--- a/docs/pptx/whole/ritu-linsubhr-sens-throm2.pptx
+++ b/docs/pptx/whole/ritu-linsubhr-sens-throm2.pptx
@@ -2443,7 +2443,7 @@
           </p:nvSpPr>
           <p:spPr>
             <a:xfrm>
-              <a:off x="2520195" y="2073503"/>
+              <a:off x="2520043" y="2073503"/>
               <a:ext cx="0" cy="3649639"/>
             </a:xfrm>
             <a:custGeom>
@@ -2486,7 +2486,7 @@
           </p:nvSpPr>
           <p:spPr>
             <a:xfrm>
-              <a:off x="4326850" y="2073503"/>
+              <a:off x="4325074" y="2073503"/>
               <a:ext cx="0" cy="3649639"/>
             </a:xfrm>
             <a:custGeom>
@@ -2529,7 +2529,7 @@
           </p:nvSpPr>
           <p:spPr>
             <a:xfrm>
-              <a:off x="6133505" y="2073503"/>
+              <a:off x="6130105" y="2073503"/>
               <a:ext cx="0" cy="3649639"/>
             </a:xfrm>
             <a:custGeom>
@@ -2572,7 +2572,7 @@
           </p:nvSpPr>
           <p:spPr>
             <a:xfrm>
-              <a:off x="7940161" y="2073503"/>
+              <a:off x="7935136" y="2073503"/>
               <a:ext cx="0" cy="3649639"/>
             </a:xfrm>
             <a:custGeom>
@@ -2830,7 +2830,7 @@
           </p:nvSpPr>
           <p:spPr>
             <a:xfrm>
-              <a:off x="1616868" y="2073503"/>
+              <a:off x="1617528" y="2073503"/>
               <a:ext cx="0" cy="3649639"/>
             </a:xfrm>
             <a:custGeom>
@@ -2873,7 +2873,7 @@
           </p:nvSpPr>
           <p:spPr>
             <a:xfrm>
-              <a:off x="3423523" y="2073503"/>
+              <a:off x="3422559" y="2073503"/>
               <a:ext cx="0" cy="3649639"/>
             </a:xfrm>
             <a:custGeom>
@@ -2916,7 +2916,7 @@
           </p:nvSpPr>
           <p:spPr>
             <a:xfrm>
-              <a:off x="5230178" y="2073503"/>
+              <a:off x="5227590" y="2073503"/>
               <a:ext cx="0" cy="3649639"/>
             </a:xfrm>
             <a:custGeom>
@@ -2959,7 +2959,7 @@
           </p:nvSpPr>
           <p:spPr>
             <a:xfrm>
-              <a:off x="7036833" y="2073503"/>
+              <a:off x="7032620" y="2073503"/>
               <a:ext cx="0" cy="3649639"/>
             </a:xfrm>
             <a:custGeom>
@@ -3002,612 +3002,612 @@
           </p:nvSpPr>
           <p:spPr>
             <a:xfrm>
-              <a:off x="1172049" y="3198948"/>
-              <a:ext cx="7090630" cy="2126837"/>
+              <a:off x="1172049" y="3196105"/>
+              <a:ext cx="7090630" cy="2129297"/>
             </a:xfrm>
             <a:custGeom>
               <a:avLst/>
               <a:pathLst>
-                <a:path w="7090630" h="2126837">
+                <a:path w="7090630" h="2129297">
                   <a:moveTo>
                     <a:pt x="0" y="0"/>
                   </a:moveTo>
                   <a:lnTo>
-                    <a:pt x="71622" y="54652"/>
-                  </a:lnTo>
-                  <a:lnTo>
-                    <a:pt x="143245" y="108038"/>
-                  </a:lnTo>
-                  <a:lnTo>
-                    <a:pt x="214867" y="160186"/>
-                  </a:lnTo>
-                  <a:lnTo>
-                    <a:pt x="286490" y="211127"/>
-                  </a:lnTo>
-                  <a:lnTo>
-                    <a:pt x="358112" y="260886"/>
-                  </a:lnTo>
-                  <a:lnTo>
-                    <a:pt x="429735" y="309493"/>
-                  </a:lnTo>
-                  <a:lnTo>
-                    <a:pt x="501357" y="356973"/>
-                  </a:lnTo>
-                  <a:lnTo>
-                    <a:pt x="572980" y="403352"/>
-                  </a:lnTo>
-                  <a:lnTo>
-                    <a:pt x="644602" y="448657"/>
-                  </a:lnTo>
-                  <a:lnTo>
-                    <a:pt x="716225" y="492912"/>
-                  </a:lnTo>
-                  <a:lnTo>
-                    <a:pt x="787847" y="536142"/>
-                  </a:lnTo>
-                  <a:lnTo>
-                    <a:pt x="859470" y="578369"/>
-                  </a:lnTo>
-                  <a:lnTo>
-                    <a:pt x="931092" y="619618"/>
-                  </a:lnTo>
-                  <a:lnTo>
-                    <a:pt x="1002715" y="659911"/>
-                  </a:lnTo>
-                  <a:lnTo>
-                    <a:pt x="1074337" y="699270"/>
-                  </a:lnTo>
-                  <a:lnTo>
-                    <a:pt x="1145960" y="737718"/>
-                  </a:lnTo>
-                  <a:lnTo>
-                    <a:pt x="1217582" y="775274"/>
-                  </a:lnTo>
-                  <a:lnTo>
-                    <a:pt x="1289205" y="811960"/>
-                  </a:lnTo>
-                  <a:lnTo>
-                    <a:pt x="1360827" y="847795"/>
-                  </a:lnTo>
-                  <a:lnTo>
-                    <a:pt x="1432450" y="882800"/>
-                  </a:lnTo>
-                  <a:lnTo>
-                    <a:pt x="1504073" y="916994"/>
-                  </a:lnTo>
-                  <a:lnTo>
-                    <a:pt x="1575695" y="950396"/>
-                  </a:lnTo>
-                  <a:lnTo>
-                    <a:pt x="1647318" y="983023"/>
-                  </a:lnTo>
-                  <a:lnTo>
-                    <a:pt x="1718940" y="1014895"/>
-                  </a:lnTo>
-                  <a:lnTo>
-                    <a:pt x="1790563" y="1046027"/>
-                  </a:lnTo>
-                  <a:lnTo>
-                    <a:pt x="1862185" y="1076439"/>
-                  </a:lnTo>
-                  <a:lnTo>
-                    <a:pt x="1933808" y="1106145"/>
-                  </a:lnTo>
-                  <a:lnTo>
-                    <a:pt x="2005430" y="1135163"/>
-                  </a:lnTo>
-                  <a:lnTo>
-                    <a:pt x="2077053" y="1163509"/>
-                  </a:lnTo>
-                  <a:lnTo>
-                    <a:pt x="2148675" y="1191197"/>
-                  </a:lnTo>
-                  <a:lnTo>
-                    <a:pt x="2220298" y="1218244"/>
-                  </a:lnTo>
-                  <a:lnTo>
-                    <a:pt x="2291920" y="1244665"/>
-                  </a:lnTo>
-                  <a:lnTo>
-                    <a:pt x="2363543" y="1270472"/>
-                  </a:lnTo>
-                  <a:lnTo>
-                    <a:pt x="2435165" y="1295682"/>
-                  </a:lnTo>
-                  <a:lnTo>
-                    <a:pt x="2506788" y="1320308"/>
-                  </a:lnTo>
-                  <a:lnTo>
-                    <a:pt x="2578410" y="1344363"/>
-                  </a:lnTo>
-                  <a:lnTo>
-                    <a:pt x="2650033" y="1367860"/>
-                  </a:lnTo>
-                  <a:lnTo>
-                    <a:pt x="2721655" y="1390813"/>
-                  </a:lnTo>
-                  <a:lnTo>
-                    <a:pt x="2793278" y="1413234"/>
-                  </a:lnTo>
-                  <a:lnTo>
-                    <a:pt x="2864901" y="1435136"/>
-                  </a:lnTo>
-                  <a:lnTo>
-                    <a:pt x="2936523" y="1456530"/>
-                  </a:lnTo>
-                  <a:lnTo>
-                    <a:pt x="3008146" y="1477428"/>
-                  </a:lnTo>
-                  <a:lnTo>
-                    <a:pt x="3079768" y="1497841"/>
-                  </a:lnTo>
-                  <a:lnTo>
-                    <a:pt x="3151391" y="1517782"/>
-                  </a:lnTo>
-                  <a:lnTo>
-                    <a:pt x="3223013" y="1523706"/>
-                  </a:lnTo>
-                  <a:lnTo>
-                    <a:pt x="3294636" y="1511798"/>
-                  </a:lnTo>
-                  <a:lnTo>
-                    <a:pt x="3366258" y="1499720"/>
-                  </a:lnTo>
-                  <a:lnTo>
-                    <a:pt x="3437881" y="1487470"/>
-                  </a:lnTo>
-                  <a:lnTo>
-                    <a:pt x="3509503" y="1475045"/>
-                  </a:lnTo>
-                  <a:lnTo>
-                    <a:pt x="3581126" y="1462443"/>
-                  </a:lnTo>
-                  <a:lnTo>
-                    <a:pt x="3652748" y="1449661"/>
-                  </a:lnTo>
-                  <a:lnTo>
-                    <a:pt x="3724371" y="1436697"/>
-                  </a:lnTo>
-                  <a:lnTo>
-                    <a:pt x="3795993" y="1423548"/>
-                  </a:lnTo>
-                  <a:lnTo>
-                    <a:pt x="3867616" y="1410211"/>
-                  </a:lnTo>
-                  <a:lnTo>
-                    <a:pt x="3939238" y="1396684"/>
-                  </a:lnTo>
-                  <a:lnTo>
-                    <a:pt x="4010861" y="1382964"/>
-                  </a:lnTo>
-                  <a:lnTo>
-                    <a:pt x="4082483" y="1369048"/>
-                  </a:lnTo>
-                  <a:lnTo>
-                    <a:pt x="4154106" y="1354933"/>
-                  </a:lnTo>
-                  <a:lnTo>
-                    <a:pt x="4225729" y="1340618"/>
-                  </a:lnTo>
-                  <a:lnTo>
-                    <a:pt x="4297351" y="1326098"/>
-                  </a:lnTo>
-                  <a:lnTo>
-                    <a:pt x="4368974" y="1311370"/>
-                  </a:lnTo>
-                  <a:lnTo>
-                    <a:pt x="4440596" y="1296433"/>
-                  </a:lnTo>
-                  <a:lnTo>
-                    <a:pt x="4512219" y="1281282"/>
-                  </a:lnTo>
-                  <a:lnTo>
-                    <a:pt x="4583841" y="1265916"/>
-                  </a:lnTo>
-                  <a:lnTo>
-                    <a:pt x="4655464" y="1250330"/>
-                  </a:lnTo>
-                  <a:lnTo>
-                    <a:pt x="4727086" y="1234522"/>
-                  </a:lnTo>
-                  <a:lnTo>
-                    <a:pt x="4798709" y="1218488"/>
-                  </a:lnTo>
-                  <a:lnTo>
-                    <a:pt x="4870331" y="1202225"/>
-                  </a:lnTo>
-                  <a:lnTo>
-                    <a:pt x="4941954" y="1185731"/>
-                  </a:lnTo>
-                  <a:lnTo>
-                    <a:pt x="5013576" y="1169001"/>
-                  </a:lnTo>
-                  <a:lnTo>
-                    <a:pt x="5085199" y="1152032"/>
-                  </a:lnTo>
-                  <a:lnTo>
-                    <a:pt x="5156821" y="1134821"/>
-                  </a:lnTo>
-                  <a:lnTo>
-                    <a:pt x="5228444" y="1117365"/>
-                  </a:lnTo>
-                  <a:lnTo>
-                    <a:pt x="5300066" y="1099659"/>
-                  </a:lnTo>
-                  <a:lnTo>
-                    <a:pt x="5371689" y="1081701"/>
-                  </a:lnTo>
-                  <a:lnTo>
-                    <a:pt x="5443311" y="1063487"/>
-                  </a:lnTo>
-                  <a:lnTo>
-                    <a:pt x="5514934" y="1045013"/>
-                  </a:lnTo>
-                  <a:lnTo>
-                    <a:pt x="5586557" y="1026275"/>
-                  </a:lnTo>
-                  <a:lnTo>
-                    <a:pt x="5658179" y="1007270"/>
-                  </a:lnTo>
-                  <a:lnTo>
-                    <a:pt x="5729802" y="987994"/>
-                  </a:lnTo>
-                  <a:lnTo>
-                    <a:pt x="5801424" y="968443"/>
-                  </a:lnTo>
-                  <a:lnTo>
-                    <a:pt x="5873047" y="948613"/>
-                  </a:lnTo>
-                  <a:lnTo>
-                    <a:pt x="5944669" y="928500"/>
-                  </a:lnTo>
-                  <a:lnTo>
-                    <a:pt x="6016292" y="908100"/>
-                  </a:lnTo>
-                  <a:lnTo>
-                    <a:pt x="6087914" y="887408"/>
-                  </a:lnTo>
-                  <a:lnTo>
-                    <a:pt x="6159537" y="866422"/>
-                  </a:lnTo>
-                  <a:lnTo>
-                    <a:pt x="6231159" y="845136"/>
-                  </a:lnTo>
-                  <a:lnTo>
-                    <a:pt x="6302782" y="823547"/>
-                  </a:lnTo>
-                  <a:lnTo>
-                    <a:pt x="6374404" y="801649"/>
-                  </a:lnTo>
-                  <a:lnTo>
-                    <a:pt x="6446027" y="779439"/>
-                  </a:lnTo>
-                  <a:lnTo>
-                    <a:pt x="6517649" y="756912"/>
-                  </a:lnTo>
-                  <a:lnTo>
-                    <a:pt x="6589272" y="734064"/>
-                  </a:lnTo>
-                  <a:lnTo>
-                    <a:pt x="6660894" y="710890"/>
-                  </a:lnTo>
-                  <a:lnTo>
-                    <a:pt x="6732517" y="687385"/>
-                  </a:lnTo>
-                  <a:lnTo>
-                    <a:pt x="6804139" y="663545"/>
-                  </a:lnTo>
-                  <a:lnTo>
-                    <a:pt x="6875762" y="639364"/>
-                  </a:lnTo>
-                  <a:lnTo>
-                    <a:pt x="6947385" y="614839"/>
-                  </a:lnTo>
-                  <a:lnTo>
-                    <a:pt x="7019007" y="589964"/>
-                  </a:lnTo>
-                  <a:lnTo>
-                    <a:pt x="7090630" y="564733"/>
-                  </a:lnTo>
-                  <a:lnTo>
-                    <a:pt x="7090630" y="2126837"/>
-                  </a:lnTo>
-                  <a:lnTo>
-                    <a:pt x="7019007" y="2121346"/>
-                  </a:lnTo>
-                  <a:lnTo>
-                    <a:pt x="6947385" y="2115724"/>
-                  </a:lnTo>
-                  <a:lnTo>
-                    <a:pt x="6875762" y="2109969"/>
-                  </a:lnTo>
-                  <a:lnTo>
-                    <a:pt x="6804139" y="2104078"/>
-                  </a:lnTo>
-                  <a:lnTo>
-                    <a:pt x="6732517" y="2098047"/>
-                  </a:lnTo>
-                  <a:lnTo>
-                    <a:pt x="6660894" y="2091872"/>
-                  </a:lnTo>
-                  <a:lnTo>
-                    <a:pt x="6589272" y="2085552"/>
-                  </a:lnTo>
-                  <a:lnTo>
-                    <a:pt x="6517649" y="2079081"/>
-                  </a:lnTo>
-                  <a:lnTo>
-                    <a:pt x="6446027" y="2072456"/>
-                  </a:lnTo>
-                  <a:lnTo>
-                    <a:pt x="6374404" y="2065675"/>
-                  </a:lnTo>
-                  <a:lnTo>
-                    <a:pt x="6302782" y="2058733"/>
-                  </a:lnTo>
-                  <a:lnTo>
-                    <a:pt x="6231159" y="2051626"/>
-                  </a:lnTo>
-                  <a:lnTo>
-                    <a:pt x="6159537" y="2044350"/>
-                  </a:lnTo>
-                  <a:lnTo>
-                    <a:pt x="6087914" y="2036902"/>
-                  </a:lnTo>
-                  <a:lnTo>
-                    <a:pt x="6016292" y="2029277"/>
-                  </a:lnTo>
-                  <a:lnTo>
-                    <a:pt x="5944669" y="2021471"/>
-                  </a:lnTo>
-                  <a:lnTo>
-                    <a:pt x="5873047" y="2013480"/>
-                  </a:lnTo>
-                  <a:lnTo>
-                    <a:pt x="5801424" y="2005299"/>
-                  </a:lnTo>
-                  <a:lnTo>
-                    <a:pt x="5729802" y="1996925"/>
-                  </a:lnTo>
-                  <a:lnTo>
-                    <a:pt x="5658179" y="1988351"/>
-                  </a:lnTo>
-                  <a:lnTo>
-                    <a:pt x="5586557" y="1979574"/>
-                  </a:lnTo>
-                  <a:lnTo>
-                    <a:pt x="5514934" y="1970589"/>
-                  </a:lnTo>
-                  <a:lnTo>
-                    <a:pt x="5443311" y="1961391"/>
-                  </a:lnTo>
-                  <a:lnTo>
-                    <a:pt x="5371689" y="1951975"/>
-                  </a:lnTo>
-                  <a:lnTo>
-                    <a:pt x="5300066" y="1942335"/>
-                  </a:lnTo>
-                  <a:lnTo>
-                    <a:pt x="5228444" y="1932467"/>
-                  </a:lnTo>
-                  <a:lnTo>
-                    <a:pt x="5156821" y="1922364"/>
-                  </a:lnTo>
-                  <a:lnTo>
-                    <a:pt x="5085199" y="1912022"/>
-                  </a:lnTo>
-                  <a:lnTo>
-                    <a:pt x="5013576" y="1901434"/>
-                  </a:lnTo>
-                  <a:lnTo>
-                    <a:pt x="4941954" y="1890595"/>
-                  </a:lnTo>
-                  <a:lnTo>
-                    <a:pt x="4870331" y="1879499"/>
-                  </a:lnTo>
-                  <a:lnTo>
-                    <a:pt x="4798709" y="1868140"/>
-                  </a:lnTo>
-                  <a:lnTo>
-                    <a:pt x="4727086" y="1856511"/>
-                  </a:lnTo>
-                  <a:lnTo>
-                    <a:pt x="4655464" y="1844607"/>
-                  </a:lnTo>
-                  <a:lnTo>
-                    <a:pt x="4583841" y="1832420"/>
-                  </a:lnTo>
-                  <a:lnTo>
-                    <a:pt x="4512219" y="1819944"/>
-                  </a:lnTo>
-                  <a:lnTo>
-                    <a:pt x="4440596" y="1807172"/>
-                  </a:lnTo>
-                  <a:lnTo>
-                    <a:pt x="4368974" y="1794096"/>
-                  </a:lnTo>
-                  <a:lnTo>
-                    <a:pt x="4297351" y="1780711"/>
-                  </a:lnTo>
-                  <a:lnTo>
-                    <a:pt x="4225729" y="1767008"/>
-                  </a:lnTo>
-                  <a:lnTo>
-                    <a:pt x="4154106" y="1752980"/>
-                  </a:lnTo>
-                  <a:lnTo>
-                    <a:pt x="4082483" y="1738619"/>
-                  </a:lnTo>
-                  <a:lnTo>
-                    <a:pt x="4010861" y="1723918"/>
-                  </a:lnTo>
-                  <a:lnTo>
-                    <a:pt x="3939238" y="1708868"/>
-                  </a:lnTo>
-                  <a:lnTo>
-                    <a:pt x="3867616" y="1693460"/>
-                  </a:lnTo>
-                  <a:lnTo>
-                    <a:pt x="3795993" y="1677688"/>
-                  </a:lnTo>
-                  <a:lnTo>
-                    <a:pt x="3724371" y="1661540"/>
-                  </a:lnTo>
-                  <a:lnTo>
-                    <a:pt x="3652748" y="1645010"/>
-                  </a:lnTo>
-                  <a:lnTo>
-                    <a:pt x="3581126" y="1628088"/>
-                  </a:lnTo>
-                  <a:lnTo>
-                    <a:pt x="3509503" y="1610764"/>
-                  </a:lnTo>
-                  <a:lnTo>
-                    <a:pt x="3437881" y="1593030"/>
-                  </a:lnTo>
-                  <a:lnTo>
-                    <a:pt x="3366258" y="1574874"/>
-                  </a:lnTo>
-                  <a:lnTo>
-                    <a:pt x="3294636" y="1556288"/>
-                  </a:lnTo>
-                  <a:lnTo>
-                    <a:pt x="3223013" y="1537261"/>
-                  </a:lnTo>
-                  <a:lnTo>
-                    <a:pt x="3151391" y="1535446"/>
-                  </a:lnTo>
-                  <a:lnTo>
-                    <a:pt x="3079768" y="1547021"/>
-                  </a:lnTo>
-                  <a:lnTo>
-                    <a:pt x="3008146" y="1558433"/>
-                  </a:lnTo>
-                  <a:lnTo>
-                    <a:pt x="2936523" y="1569685"/>
-                  </a:lnTo>
-                  <a:lnTo>
-                    <a:pt x="2864901" y="1580779"/>
-                  </a:lnTo>
-                  <a:lnTo>
-                    <a:pt x="2793278" y="1591716"/>
-                  </a:lnTo>
-                  <a:lnTo>
-                    <a:pt x="2721655" y="1602500"/>
-                  </a:lnTo>
-                  <a:lnTo>
-                    <a:pt x="2650033" y="1613132"/>
-                  </a:lnTo>
-                  <a:lnTo>
-                    <a:pt x="2578410" y="1623614"/>
-                  </a:lnTo>
-                  <a:lnTo>
-                    <a:pt x="2506788" y="1633949"/>
-                  </a:lnTo>
-                  <a:lnTo>
-                    <a:pt x="2435165" y="1644138"/>
-                  </a:lnTo>
-                  <a:lnTo>
-                    <a:pt x="2363543" y="1654185"/>
-                  </a:lnTo>
-                  <a:lnTo>
-                    <a:pt x="2291920" y="1664089"/>
-                  </a:lnTo>
-                  <a:lnTo>
-                    <a:pt x="2220298" y="1673855"/>
-                  </a:lnTo>
-                  <a:lnTo>
-                    <a:pt x="2148675" y="1683483"/>
-                  </a:lnTo>
-                  <a:lnTo>
-                    <a:pt x="2077053" y="1692976"/>
-                  </a:lnTo>
-                  <a:lnTo>
-                    <a:pt x="2005430" y="1702335"/>
-                  </a:lnTo>
-                  <a:lnTo>
-                    <a:pt x="1933808" y="1711563"/>
-                  </a:lnTo>
-                  <a:lnTo>
-                    <a:pt x="1862185" y="1720660"/>
-                  </a:lnTo>
-                  <a:lnTo>
-                    <a:pt x="1790563" y="1729630"/>
-                  </a:lnTo>
-                  <a:lnTo>
-                    <a:pt x="1718940" y="1738474"/>
-                  </a:lnTo>
-                  <a:lnTo>
-                    <a:pt x="1647318" y="1747193"/>
-                  </a:lnTo>
-                  <a:lnTo>
-                    <a:pt x="1575695" y="1755789"/>
-                  </a:lnTo>
-                  <a:lnTo>
-                    <a:pt x="1504073" y="1764265"/>
-                  </a:lnTo>
-                  <a:lnTo>
-                    <a:pt x="1432450" y="1772621"/>
-                  </a:lnTo>
-                  <a:lnTo>
-                    <a:pt x="1360827" y="1780860"/>
-                  </a:lnTo>
-                  <a:lnTo>
-                    <a:pt x="1289205" y="1788983"/>
-                  </a:lnTo>
-                  <a:lnTo>
-                    <a:pt x="1217582" y="1796991"/>
-                  </a:lnTo>
-                  <a:lnTo>
-                    <a:pt x="1145960" y="1804887"/>
-                  </a:lnTo>
-                  <a:lnTo>
-                    <a:pt x="1074337" y="1812672"/>
-                  </a:lnTo>
-                  <a:lnTo>
-                    <a:pt x="1002715" y="1820348"/>
-                  </a:lnTo>
-                  <a:lnTo>
-                    <a:pt x="931092" y="1827915"/>
-                  </a:lnTo>
-                  <a:lnTo>
-                    <a:pt x="859470" y="1835376"/>
-                  </a:lnTo>
-                  <a:lnTo>
-                    <a:pt x="787847" y="1842732"/>
-                  </a:lnTo>
-                  <a:lnTo>
-                    <a:pt x="716225" y="1849985"/>
-                  </a:lnTo>
-                  <a:lnTo>
-                    <a:pt x="644602" y="1857135"/>
-                  </a:lnTo>
-                  <a:lnTo>
-                    <a:pt x="572980" y="1864185"/>
-                  </a:lnTo>
-                  <a:lnTo>
-                    <a:pt x="501357" y="1871136"/>
-                  </a:lnTo>
-                  <a:lnTo>
-                    <a:pt x="429735" y="1877989"/>
-                  </a:lnTo>
-                  <a:lnTo>
-                    <a:pt x="358112" y="1884745"/>
-                  </a:lnTo>
-                  <a:lnTo>
-                    <a:pt x="286490" y="1891407"/>
-                  </a:lnTo>
-                  <a:lnTo>
-                    <a:pt x="214867" y="1897975"/>
-                  </a:lnTo>
-                  <a:lnTo>
-                    <a:pt x="143245" y="1904450"/>
-                  </a:lnTo>
-                  <a:lnTo>
-                    <a:pt x="71622" y="1910835"/>
-                  </a:lnTo>
-                  <a:lnTo>
-                    <a:pt x="0" y="1917129"/>
+                    <a:pt x="71622" y="54707"/>
+                  </a:lnTo>
+                  <a:lnTo>
+                    <a:pt x="143245" y="108147"/>
+                  </a:lnTo>
+                  <a:lnTo>
+                    <a:pt x="214867" y="160349"/>
+                  </a:lnTo>
+                  <a:lnTo>
+                    <a:pt x="286490" y="211342"/>
+                  </a:lnTo>
+                  <a:lnTo>
+                    <a:pt x="358112" y="261153"/>
+                  </a:lnTo>
+                  <a:lnTo>
+                    <a:pt x="429735" y="309810"/>
+                  </a:lnTo>
+                  <a:lnTo>
+                    <a:pt x="501357" y="357339"/>
+                  </a:lnTo>
+                  <a:lnTo>
+                    <a:pt x="572980" y="403767"/>
+                  </a:lnTo>
+                  <a:lnTo>
+                    <a:pt x="644602" y="449120"/>
+                  </a:lnTo>
+                  <a:lnTo>
+                    <a:pt x="716225" y="493422"/>
+                  </a:lnTo>
+                  <a:lnTo>
+                    <a:pt x="787847" y="536697"/>
+                  </a:lnTo>
+                  <a:lnTo>
+                    <a:pt x="859470" y="578969"/>
+                  </a:lnTo>
+                  <a:lnTo>
+                    <a:pt x="931092" y="620262"/>
+                  </a:lnTo>
+                  <a:lnTo>
+                    <a:pt x="1002715" y="660598"/>
+                  </a:lnTo>
+                  <a:lnTo>
+                    <a:pt x="1074337" y="700000"/>
+                  </a:lnTo>
+                  <a:lnTo>
+                    <a:pt x="1145960" y="738489"/>
+                  </a:lnTo>
+                  <a:lnTo>
+                    <a:pt x="1217582" y="776086"/>
+                  </a:lnTo>
+                  <a:lnTo>
+                    <a:pt x="1289205" y="812812"/>
+                  </a:lnTo>
+                  <a:lnTo>
+                    <a:pt x="1360827" y="848687"/>
+                  </a:lnTo>
+                  <a:lnTo>
+                    <a:pt x="1432450" y="883730"/>
+                  </a:lnTo>
+                  <a:lnTo>
+                    <a:pt x="1504073" y="917962"/>
+                  </a:lnTo>
+                  <a:lnTo>
+                    <a:pt x="1575695" y="951401"/>
+                  </a:lnTo>
+                  <a:lnTo>
+                    <a:pt x="1647318" y="984064"/>
+                  </a:lnTo>
+                  <a:lnTo>
+                    <a:pt x="1718940" y="1015971"/>
+                  </a:lnTo>
+                  <a:lnTo>
+                    <a:pt x="1790563" y="1047139"/>
+                  </a:lnTo>
+                  <a:lnTo>
+                    <a:pt x="1862185" y="1077585"/>
+                  </a:lnTo>
+                  <a:lnTo>
+                    <a:pt x="1933808" y="1107325"/>
+                  </a:lnTo>
+                  <a:lnTo>
+                    <a:pt x="2005430" y="1136376"/>
+                  </a:lnTo>
+                  <a:lnTo>
+                    <a:pt x="2077053" y="1164754"/>
+                  </a:lnTo>
+                  <a:lnTo>
+                    <a:pt x="2148675" y="1192474"/>
+                  </a:lnTo>
+                  <a:lnTo>
+                    <a:pt x="2220298" y="1219552"/>
+                  </a:lnTo>
+                  <a:lnTo>
+                    <a:pt x="2291920" y="1246003"/>
+                  </a:lnTo>
+                  <a:lnTo>
+                    <a:pt x="2363543" y="1271841"/>
+                  </a:lnTo>
+                  <a:lnTo>
+                    <a:pt x="2435165" y="1297080"/>
+                  </a:lnTo>
+                  <a:lnTo>
+                    <a:pt x="2506788" y="1321734"/>
+                  </a:lnTo>
+                  <a:lnTo>
+                    <a:pt x="2578410" y="1345817"/>
+                  </a:lnTo>
+                  <a:lnTo>
+                    <a:pt x="2650033" y="1369343"/>
+                  </a:lnTo>
+                  <a:lnTo>
+                    <a:pt x="2721655" y="1392323"/>
+                  </a:lnTo>
+                  <a:lnTo>
+                    <a:pt x="2793278" y="1414770"/>
+                  </a:lnTo>
+                  <a:lnTo>
+                    <a:pt x="2864901" y="1436698"/>
+                  </a:lnTo>
+                  <a:lnTo>
+                    <a:pt x="2936523" y="1458117"/>
+                  </a:lnTo>
+                  <a:lnTo>
+                    <a:pt x="3008146" y="1479040"/>
+                  </a:lnTo>
+                  <a:lnTo>
+                    <a:pt x="3079768" y="1499479"/>
+                  </a:lnTo>
+                  <a:lnTo>
+                    <a:pt x="3151391" y="1519444"/>
+                  </a:lnTo>
+                  <a:lnTo>
+                    <a:pt x="3223013" y="1527200"/>
+                  </a:lnTo>
+                  <a:lnTo>
+                    <a:pt x="3294636" y="1515142"/>
+                  </a:lnTo>
+                  <a:lnTo>
+                    <a:pt x="3366258" y="1502910"/>
+                  </a:lnTo>
+                  <a:lnTo>
+                    <a:pt x="3437881" y="1490501"/>
+                  </a:lnTo>
+                  <a:lnTo>
+                    <a:pt x="3509503" y="1477912"/>
+                  </a:lnTo>
+                  <a:lnTo>
+                    <a:pt x="3581126" y="1465141"/>
+                  </a:lnTo>
+                  <a:lnTo>
+                    <a:pt x="3652748" y="1452186"/>
+                  </a:lnTo>
+                  <a:lnTo>
+                    <a:pt x="3724371" y="1439043"/>
+                  </a:lnTo>
+                  <a:lnTo>
+                    <a:pt x="3795993" y="1425711"/>
+                  </a:lnTo>
+                  <a:lnTo>
+                    <a:pt x="3867616" y="1412185"/>
+                  </a:lnTo>
+                  <a:lnTo>
+                    <a:pt x="3939238" y="1398464"/>
+                  </a:lnTo>
+                  <a:lnTo>
+                    <a:pt x="4010861" y="1384545"/>
+                  </a:lnTo>
+                  <a:lnTo>
+                    <a:pt x="4082483" y="1370424"/>
+                  </a:lnTo>
+                  <a:lnTo>
+                    <a:pt x="4154106" y="1356099"/>
+                  </a:lnTo>
+                  <a:lnTo>
+                    <a:pt x="4225729" y="1341567"/>
+                  </a:lnTo>
+                  <a:lnTo>
+                    <a:pt x="4297351" y="1326825"/>
+                  </a:lnTo>
+                  <a:lnTo>
+                    <a:pt x="4368974" y="1311870"/>
+                  </a:lnTo>
+                  <a:lnTo>
+                    <a:pt x="4440596" y="1296698"/>
+                  </a:lnTo>
+                  <a:lnTo>
+                    <a:pt x="4512219" y="1281307"/>
+                  </a:lnTo>
+                  <a:lnTo>
+                    <a:pt x="4583841" y="1265694"/>
+                  </a:lnTo>
+                  <a:lnTo>
+                    <a:pt x="4655464" y="1249855"/>
+                  </a:lnTo>
+                  <a:lnTo>
+                    <a:pt x="4727086" y="1233787"/>
+                  </a:lnTo>
+                  <a:lnTo>
+                    <a:pt x="4798709" y="1217486"/>
+                  </a:lnTo>
+                  <a:lnTo>
+                    <a:pt x="4870331" y="1200950"/>
+                  </a:lnTo>
+                  <a:lnTo>
+                    <a:pt x="4941954" y="1184175"/>
+                  </a:lnTo>
+                  <a:lnTo>
+                    <a:pt x="5013576" y="1167157"/>
+                  </a:lnTo>
+                  <a:lnTo>
+                    <a:pt x="5085199" y="1149893"/>
+                  </a:lnTo>
+                  <a:lnTo>
+                    <a:pt x="5156821" y="1132379"/>
+                  </a:lnTo>
+                  <a:lnTo>
+                    <a:pt x="5228444" y="1114613"/>
+                  </a:lnTo>
+                  <a:lnTo>
+                    <a:pt x="5300066" y="1096589"/>
+                  </a:lnTo>
+                  <a:lnTo>
+                    <a:pt x="5371689" y="1078305"/>
+                  </a:lnTo>
+                  <a:lnTo>
+                    <a:pt x="5443311" y="1059756"/>
+                  </a:lnTo>
+                  <a:lnTo>
+                    <a:pt x="5514934" y="1040939"/>
+                  </a:lnTo>
+                  <a:lnTo>
+                    <a:pt x="5586557" y="1021850"/>
+                  </a:lnTo>
+                  <a:lnTo>
+                    <a:pt x="5658179" y="1002485"/>
+                  </a:lnTo>
+                  <a:lnTo>
+                    <a:pt x="5729802" y="982840"/>
+                  </a:lnTo>
+                  <a:lnTo>
+                    <a:pt x="5801424" y="962912"/>
+                  </a:lnTo>
+                  <a:lnTo>
+                    <a:pt x="5873047" y="942694"/>
+                  </a:lnTo>
+                  <a:lnTo>
+                    <a:pt x="5944669" y="922185"/>
+                  </a:lnTo>
+                  <a:lnTo>
+                    <a:pt x="6016292" y="901379"/>
+                  </a:lnTo>
+                  <a:lnTo>
+                    <a:pt x="6087914" y="880272"/>
+                  </a:lnTo>
+                  <a:lnTo>
+                    <a:pt x="6159537" y="858860"/>
+                  </a:lnTo>
+                  <a:lnTo>
+                    <a:pt x="6231159" y="837139"/>
+                  </a:lnTo>
+                  <a:lnTo>
+                    <a:pt x="6302782" y="815103"/>
+                  </a:lnTo>
+                  <a:lnTo>
+                    <a:pt x="6374404" y="792749"/>
+                  </a:lnTo>
+                  <a:lnTo>
+                    <a:pt x="6446027" y="770071"/>
+                  </a:lnTo>
+                  <a:lnTo>
+                    <a:pt x="6517649" y="747066"/>
+                  </a:lnTo>
+                  <a:lnTo>
+                    <a:pt x="6589272" y="723728"/>
+                  </a:lnTo>
+                  <a:lnTo>
+                    <a:pt x="6660894" y="700052"/>
+                  </a:lnTo>
+                  <a:lnTo>
+                    <a:pt x="6732517" y="676035"/>
+                  </a:lnTo>
+                  <a:lnTo>
+                    <a:pt x="6804139" y="651669"/>
+                  </a:lnTo>
+                  <a:lnTo>
+                    <a:pt x="6875762" y="626952"/>
+                  </a:lnTo>
+                  <a:lnTo>
+                    <a:pt x="6947385" y="601877"/>
+                  </a:lnTo>
+                  <a:lnTo>
+                    <a:pt x="7019007" y="576440"/>
+                  </a:lnTo>
+                  <a:lnTo>
+                    <a:pt x="7090630" y="550635"/>
+                  </a:lnTo>
+                  <a:lnTo>
+                    <a:pt x="7090630" y="2129297"/>
+                  </a:lnTo>
+                  <a:lnTo>
+                    <a:pt x="7019007" y="2123798"/>
+                  </a:lnTo>
+                  <a:lnTo>
+                    <a:pt x="6947385" y="2118168"/>
+                  </a:lnTo>
+                  <a:lnTo>
+                    <a:pt x="6875762" y="2112405"/>
+                  </a:lnTo>
+                  <a:lnTo>
+                    <a:pt x="6804139" y="2106505"/>
+                  </a:lnTo>
+                  <a:lnTo>
+                    <a:pt x="6732517" y="2100465"/>
+                  </a:lnTo>
+                  <a:lnTo>
+                    <a:pt x="6660894" y="2094282"/>
+                  </a:lnTo>
+                  <a:lnTo>
+                    <a:pt x="6589272" y="2087952"/>
+                  </a:lnTo>
+                  <a:lnTo>
+                    <a:pt x="6517649" y="2081472"/>
+                  </a:lnTo>
+                  <a:lnTo>
+                    <a:pt x="6446027" y="2074838"/>
+                  </a:lnTo>
+                  <a:lnTo>
+                    <a:pt x="6374404" y="2068047"/>
+                  </a:lnTo>
+                  <a:lnTo>
+                    <a:pt x="6302782" y="2061095"/>
+                  </a:lnTo>
+                  <a:lnTo>
+                    <a:pt x="6231159" y="2053978"/>
+                  </a:lnTo>
+                  <a:lnTo>
+                    <a:pt x="6159537" y="2046692"/>
+                  </a:lnTo>
+                  <a:lnTo>
+                    <a:pt x="6087914" y="2039233"/>
+                  </a:lnTo>
+                  <a:lnTo>
+                    <a:pt x="6016292" y="2031598"/>
+                  </a:lnTo>
+                  <a:lnTo>
+                    <a:pt x="5944669" y="2023781"/>
+                  </a:lnTo>
+                  <a:lnTo>
+                    <a:pt x="5873047" y="2015779"/>
+                  </a:lnTo>
+                  <a:lnTo>
+                    <a:pt x="5801424" y="2007587"/>
+                  </a:lnTo>
+                  <a:lnTo>
+                    <a:pt x="5729802" y="1999201"/>
+                  </a:lnTo>
+                  <a:lnTo>
+                    <a:pt x="5658179" y="1990616"/>
+                  </a:lnTo>
+                  <a:lnTo>
+                    <a:pt x="5586557" y="1981827"/>
+                  </a:lnTo>
+                  <a:lnTo>
+                    <a:pt x="5514934" y="1972829"/>
+                  </a:lnTo>
+                  <a:lnTo>
+                    <a:pt x="5443311" y="1963619"/>
+                  </a:lnTo>
+                  <a:lnTo>
+                    <a:pt x="5371689" y="1954190"/>
+                  </a:lnTo>
+                  <a:lnTo>
+                    <a:pt x="5300066" y="1944537"/>
+                  </a:lnTo>
+                  <a:lnTo>
+                    <a:pt x="5228444" y="1934655"/>
+                  </a:lnTo>
+                  <a:lnTo>
+                    <a:pt x="5156821" y="1924539"/>
+                  </a:lnTo>
+                  <a:lnTo>
+                    <a:pt x="5085199" y="1914183"/>
+                  </a:lnTo>
+                  <a:lnTo>
+                    <a:pt x="5013576" y="1903581"/>
+                  </a:lnTo>
+                  <a:lnTo>
+                    <a:pt x="4941954" y="1892728"/>
+                  </a:lnTo>
+                  <a:lnTo>
+                    <a:pt x="4870331" y="1881617"/>
+                  </a:lnTo>
+                  <a:lnTo>
+                    <a:pt x="4798709" y="1870243"/>
+                  </a:lnTo>
+                  <a:lnTo>
+                    <a:pt x="4727086" y="1858599"/>
+                  </a:lnTo>
+                  <a:lnTo>
+                    <a:pt x="4655464" y="1846679"/>
+                  </a:lnTo>
+                  <a:lnTo>
+                    <a:pt x="4583841" y="1834476"/>
+                  </a:lnTo>
+                  <a:lnTo>
+                    <a:pt x="4512219" y="1821983"/>
+                  </a:lnTo>
+                  <a:lnTo>
+                    <a:pt x="4440596" y="1809195"/>
+                  </a:lnTo>
+                  <a:lnTo>
+                    <a:pt x="4368974" y="1796103"/>
+                  </a:lnTo>
+                  <a:lnTo>
+                    <a:pt x="4297351" y="1782700"/>
+                  </a:lnTo>
+                  <a:lnTo>
+                    <a:pt x="4225729" y="1768980"/>
+                  </a:lnTo>
+                  <a:lnTo>
+                    <a:pt x="4154106" y="1754934"/>
+                  </a:lnTo>
+                  <a:lnTo>
+                    <a:pt x="4082483" y="1740555"/>
+                  </a:lnTo>
+                  <a:lnTo>
+                    <a:pt x="4010861" y="1725835"/>
+                  </a:lnTo>
+                  <a:lnTo>
+                    <a:pt x="3939238" y="1710765"/>
+                  </a:lnTo>
+                  <a:lnTo>
+                    <a:pt x="3867616" y="1695339"/>
+                  </a:lnTo>
+                  <a:lnTo>
+                    <a:pt x="3795993" y="1679546"/>
+                  </a:lnTo>
+                  <a:lnTo>
+                    <a:pt x="3724371" y="1663379"/>
+                  </a:lnTo>
+                  <a:lnTo>
+                    <a:pt x="3652748" y="1646828"/>
+                  </a:lnTo>
+                  <a:lnTo>
+                    <a:pt x="3581126" y="1629885"/>
+                  </a:lnTo>
+                  <a:lnTo>
+                    <a:pt x="3509503" y="1612539"/>
+                  </a:lnTo>
+                  <a:lnTo>
+                    <a:pt x="3437881" y="1594783"/>
+                  </a:lnTo>
+                  <a:lnTo>
+                    <a:pt x="3366258" y="1576605"/>
+                  </a:lnTo>
+                  <a:lnTo>
+                    <a:pt x="3294636" y="1557996"/>
+                  </a:lnTo>
+                  <a:lnTo>
+                    <a:pt x="3223013" y="1538946"/>
+                  </a:lnTo>
+                  <a:lnTo>
+                    <a:pt x="3151391" y="1539087"/>
+                  </a:lnTo>
+                  <a:lnTo>
+                    <a:pt x="3079768" y="1550803"/>
+                  </a:lnTo>
+                  <a:lnTo>
+                    <a:pt x="3008146" y="1562353"/>
+                  </a:lnTo>
+                  <a:lnTo>
+                    <a:pt x="2936523" y="1573738"/>
+                  </a:lnTo>
+                  <a:lnTo>
+                    <a:pt x="2864901" y="1584961"/>
+                  </a:lnTo>
+                  <a:lnTo>
+                    <a:pt x="2793278" y="1596024"/>
+                  </a:lnTo>
+                  <a:lnTo>
+                    <a:pt x="2721655" y="1606929"/>
+                  </a:lnTo>
+                  <a:lnTo>
+                    <a:pt x="2650033" y="1617679"/>
+                  </a:lnTo>
+                  <a:lnTo>
+                    <a:pt x="2578410" y="1628276"/>
+                  </a:lnTo>
+                  <a:lnTo>
+                    <a:pt x="2506788" y="1638721"/>
+                  </a:lnTo>
+                  <a:lnTo>
+                    <a:pt x="2435165" y="1649018"/>
+                  </a:lnTo>
+                  <a:lnTo>
+                    <a:pt x="2363543" y="1659168"/>
+                  </a:lnTo>
+                  <a:lnTo>
+                    <a:pt x="2291920" y="1669173"/>
+                  </a:lnTo>
+                  <a:lnTo>
+                    <a:pt x="2220298" y="1679036"/>
+                  </a:lnTo>
+                  <a:lnTo>
+                    <a:pt x="2148675" y="1688758"/>
+                  </a:lnTo>
+                  <a:lnTo>
+                    <a:pt x="2077053" y="1698341"/>
+                  </a:lnTo>
+                  <a:lnTo>
+                    <a:pt x="2005430" y="1707788"/>
+                  </a:lnTo>
+                  <a:lnTo>
+                    <a:pt x="1933808" y="1717100"/>
+                  </a:lnTo>
+                  <a:lnTo>
+                    <a:pt x="1862185" y="1726280"/>
+                  </a:lnTo>
+                  <a:lnTo>
+                    <a:pt x="1790563" y="1735329"/>
+                  </a:lnTo>
+                  <a:lnTo>
+                    <a:pt x="1718940" y="1744248"/>
+                  </a:lnTo>
+                  <a:lnTo>
+                    <a:pt x="1647318" y="1753041"/>
+                  </a:lnTo>
+                  <a:lnTo>
+                    <a:pt x="1575695" y="1761708"/>
+                  </a:lnTo>
+                  <a:lnTo>
+                    <a:pt x="1504073" y="1770252"/>
+                  </a:lnTo>
+                  <a:lnTo>
+                    <a:pt x="1432450" y="1778674"/>
+                  </a:lnTo>
+                  <a:lnTo>
+                    <a:pt x="1360827" y="1786976"/>
+                  </a:lnTo>
+                  <a:lnTo>
+                    <a:pt x="1289205" y="1795159"/>
+                  </a:lnTo>
+                  <a:lnTo>
+                    <a:pt x="1217582" y="1803226"/>
+                  </a:lnTo>
+                  <a:lnTo>
+                    <a:pt x="1145960" y="1811178"/>
+                  </a:lnTo>
+                  <a:lnTo>
+                    <a:pt x="1074337" y="1819017"/>
+                  </a:lnTo>
+                  <a:lnTo>
+                    <a:pt x="1002715" y="1826744"/>
+                  </a:lnTo>
+                  <a:lnTo>
+                    <a:pt x="931092" y="1834361"/>
+                  </a:lnTo>
+                  <a:lnTo>
+                    <a:pt x="859470" y="1841869"/>
+                  </a:lnTo>
+                  <a:lnTo>
+                    <a:pt x="787847" y="1849270"/>
+                  </a:lnTo>
+                  <a:lnTo>
+                    <a:pt x="716225" y="1856566"/>
+                  </a:lnTo>
+                  <a:lnTo>
+                    <a:pt x="644602" y="1863758"/>
+                  </a:lnTo>
+                  <a:lnTo>
+                    <a:pt x="572980" y="1870847"/>
+                  </a:lnTo>
+                  <a:lnTo>
+                    <a:pt x="501357" y="1877835"/>
+                  </a:lnTo>
+                  <a:lnTo>
+                    <a:pt x="429735" y="1884724"/>
+                  </a:lnTo>
+                  <a:lnTo>
+                    <a:pt x="358112" y="1891514"/>
+                  </a:lnTo>
+                  <a:lnTo>
+                    <a:pt x="286490" y="1898208"/>
+                  </a:lnTo>
+                  <a:lnTo>
+                    <a:pt x="214867" y="1904806"/>
+                  </a:lnTo>
+                  <a:lnTo>
+                    <a:pt x="143245" y="1911310"/>
+                  </a:lnTo>
+                  <a:lnTo>
+                    <a:pt x="71622" y="1917721"/>
+                  </a:lnTo>
+                  <a:lnTo>
+                    <a:pt x="0" y="1924042"/>
                   </a:lnTo>
                   <a:close/>
                 </a:path>
@@ -3633,312 +3633,312 @@
           </p:nvSpPr>
           <p:spPr>
             <a:xfrm>
-              <a:off x="1172049" y="3198948"/>
-              <a:ext cx="7090630" cy="1523706"/>
+              <a:off x="1172049" y="3196105"/>
+              <a:ext cx="7090630" cy="1527200"/>
             </a:xfrm>
             <a:custGeom>
               <a:avLst/>
               <a:pathLst>
-                <a:path w="7090630" h="1523706">
+                <a:path w="7090630" h="1527200">
                   <a:moveTo>
                     <a:pt x="0" y="0"/>
                   </a:moveTo>
                   <a:lnTo>
-                    <a:pt x="71622" y="54652"/>
-                  </a:lnTo>
-                  <a:lnTo>
-                    <a:pt x="143245" y="108038"/>
-                  </a:lnTo>
-                  <a:lnTo>
-                    <a:pt x="214867" y="160186"/>
-                  </a:lnTo>
-                  <a:lnTo>
-                    <a:pt x="286490" y="211127"/>
-                  </a:lnTo>
-                  <a:lnTo>
-                    <a:pt x="358112" y="260886"/>
-                  </a:lnTo>
-                  <a:lnTo>
-                    <a:pt x="429735" y="309493"/>
-                  </a:lnTo>
-                  <a:lnTo>
-                    <a:pt x="501357" y="356973"/>
-                  </a:lnTo>
-                  <a:lnTo>
-                    <a:pt x="572980" y="403352"/>
-                  </a:lnTo>
-                  <a:lnTo>
-                    <a:pt x="644602" y="448657"/>
-                  </a:lnTo>
-                  <a:lnTo>
-                    <a:pt x="716225" y="492912"/>
-                  </a:lnTo>
-                  <a:lnTo>
-                    <a:pt x="787847" y="536142"/>
-                  </a:lnTo>
-                  <a:lnTo>
-                    <a:pt x="859470" y="578369"/>
-                  </a:lnTo>
-                  <a:lnTo>
-                    <a:pt x="931092" y="619618"/>
-                  </a:lnTo>
-                  <a:lnTo>
-                    <a:pt x="1002715" y="659911"/>
-                  </a:lnTo>
-                  <a:lnTo>
-                    <a:pt x="1074337" y="699270"/>
-                  </a:lnTo>
-                  <a:lnTo>
-                    <a:pt x="1145960" y="737718"/>
-                  </a:lnTo>
-                  <a:lnTo>
-                    <a:pt x="1217582" y="775274"/>
-                  </a:lnTo>
-                  <a:lnTo>
-                    <a:pt x="1289205" y="811960"/>
-                  </a:lnTo>
-                  <a:lnTo>
-                    <a:pt x="1360827" y="847795"/>
-                  </a:lnTo>
-                  <a:lnTo>
-                    <a:pt x="1432450" y="882800"/>
-                  </a:lnTo>
-                  <a:lnTo>
-                    <a:pt x="1504073" y="916994"/>
-                  </a:lnTo>
-                  <a:lnTo>
-                    <a:pt x="1575695" y="950396"/>
-                  </a:lnTo>
-                  <a:lnTo>
-                    <a:pt x="1647318" y="983023"/>
-                  </a:lnTo>
-                  <a:lnTo>
-                    <a:pt x="1718940" y="1014895"/>
-                  </a:lnTo>
-                  <a:lnTo>
-                    <a:pt x="1790563" y="1046027"/>
-                  </a:lnTo>
-                  <a:lnTo>
-                    <a:pt x="1862185" y="1076439"/>
-                  </a:lnTo>
-                  <a:lnTo>
-                    <a:pt x="1933808" y="1106145"/>
-                  </a:lnTo>
-                  <a:lnTo>
-                    <a:pt x="2005430" y="1135163"/>
-                  </a:lnTo>
-                  <a:lnTo>
-                    <a:pt x="2077053" y="1163509"/>
-                  </a:lnTo>
-                  <a:lnTo>
-                    <a:pt x="2148675" y="1191197"/>
-                  </a:lnTo>
-                  <a:lnTo>
-                    <a:pt x="2220298" y="1218244"/>
-                  </a:lnTo>
-                  <a:lnTo>
-                    <a:pt x="2291920" y="1244665"/>
-                  </a:lnTo>
-                  <a:lnTo>
-                    <a:pt x="2363543" y="1270472"/>
-                  </a:lnTo>
-                  <a:lnTo>
-                    <a:pt x="2435165" y="1295682"/>
-                  </a:lnTo>
-                  <a:lnTo>
-                    <a:pt x="2506788" y="1320308"/>
-                  </a:lnTo>
-                  <a:lnTo>
-                    <a:pt x="2578410" y="1344363"/>
-                  </a:lnTo>
-                  <a:lnTo>
-                    <a:pt x="2650033" y="1367860"/>
-                  </a:lnTo>
-                  <a:lnTo>
-                    <a:pt x="2721655" y="1390813"/>
-                  </a:lnTo>
-                  <a:lnTo>
-                    <a:pt x="2793278" y="1413234"/>
-                  </a:lnTo>
-                  <a:lnTo>
-                    <a:pt x="2864901" y="1435136"/>
-                  </a:lnTo>
-                  <a:lnTo>
-                    <a:pt x="2936523" y="1456530"/>
-                  </a:lnTo>
-                  <a:lnTo>
-                    <a:pt x="3008146" y="1477428"/>
-                  </a:lnTo>
-                  <a:lnTo>
-                    <a:pt x="3079768" y="1497841"/>
-                  </a:lnTo>
-                  <a:lnTo>
-                    <a:pt x="3151391" y="1517782"/>
-                  </a:lnTo>
-                  <a:lnTo>
-                    <a:pt x="3223013" y="1523706"/>
-                  </a:lnTo>
-                  <a:lnTo>
-                    <a:pt x="3294636" y="1511798"/>
-                  </a:lnTo>
-                  <a:lnTo>
-                    <a:pt x="3366258" y="1499720"/>
-                  </a:lnTo>
-                  <a:lnTo>
-                    <a:pt x="3437881" y="1487470"/>
-                  </a:lnTo>
-                  <a:lnTo>
-                    <a:pt x="3509503" y="1475045"/>
-                  </a:lnTo>
-                  <a:lnTo>
-                    <a:pt x="3581126" y="1462443"/>
-                  </a:lnTo>
-                  <a:lnTo>
-                    <a:pt x="3652748" y="1449661"/>
-                  </a:lnTo>
-                  <a:lnTo>
-                    <a:pt x="3724371" y="1436697"/>
-                  </a:lnTo>
-                  <a:lnTo>
-                    <a:pt x="3795993" y="1423548"/>
-                  </a:lnTo>
-                  <a:lnTo>
-                    <a:pt x="3867616" y="1410211"/>
-                  </a:lnTo>
-                  <a:lnTo>
-                    <a:pt x="3939238" y="1396684"/>
-                  </a:lnTo>
-                  <a:lnTo>
-                    <a:pt x="4010861" y="1382964"/>
-                  </a:lnTo>
-                  <a:lnTo>
-                    <a:pt x="4082483" y="1369048"/>
-                  </a:lnTo>
-                  <a:lnTo>
-                    <a:pt x="4154106" y="1354933"/>
-                  </a:lnTo>
-                  <a:lnTo>
-                    <a:pt x="4225729" y="1340618"/>
-                  </a:lnTo>
-                  <a:lnTo>
-                    <a:pt x="4297351" y="1326098"/>
-                  </a:lnTo>
-                  <a:lnTo>
-                    <a:pt x="4368974" y="1311370"/>
-                  </a:lnTo>
-                  <a:lnTo>
-                    <a:pt x="4440596" y="1296433"/>
-                  </a:lnTo>
-                  <a:lnTo>
-                    <a:pt x="4512219" y="1281282"/>
-                  </a:lnTo>
-                  <a:lnTo>
-                    <a:pt x="4583841" y="1265916"/>
-                  </a:lnTo>
-                  <a:lnTo>
-                    <a:pt x="4655464" y="1250330"/>
-                  </a:lnTo>
-                  <a:lnTo>
-                    <a:pt x="4727086" y="1234522"/>
-                  </a:lnTo>
-                  <a:lnTo>
-                    <a:pt x="4798709" y="1218488"/>
-                  </a:lnTo>
-                  <a:lnTo>
-                    <a:pt x="4870331" y="1202225"/>
-                  </a:lnTo>
-                  <a:lnTo>
-                    <a:pt x="4941954" y="1185731"/>
-                  </a:lnTo>
-                  <a:lnTo>
-                    <a:pt x="5013576" y="1169001"/>
-                  </a:lnTo>
-                  <a:lnTo>
-                    <a:pt x="5085199" y="1152032"/>
-                  </a:lnTo>
-                  <a:lnTo>
-                    <a:pt x="5156821" y="1134821"/>
-                  </a:lnTo>
-                  <a:lnTo>
-                    <a:pt x="5228444" y="1117365"/>
-                  </a:lnTo>
-                  <a:lnTo>
-                    <a:pt x="5300066" y="1099659"/>
-                  </a:lnTo>
-                  <a:lnTo>
-                    <a:pt x="5371689" y="1081701"/>
-                  </a:lnTo>
-                  <a:lnTo>
-                    <a:pt x="5443311" y="1063487"/>
-                  </a:lnTo>
-                  <a:lnTo>
-                    <a:pt x="5514934" y="1045013"/>
-                  </a:lnTo>
-                  <a:lnTo>
-                    <a:pt x="5586557" y="1026275"/>
-                  </a:lnTo>
-                  <a:lnTo>
-                    <a:pt x="5658179" y="1007270"/>
-                  </a:lnTo>
-                  <a:lnTo>
-                    <a:pt x="5729802" y="987994"/>
-                  </a:lnTo>
-                  <a:lnTo>
-                    <a:pt x="5801424" y="968443"/>
-                  </a:lnTo>
-                  <a:lnTo>
-                    <a:pt x="5873047" y="948613"/>
-                  </a:lnTo>
-                  <a:lnTo>
-                    <a:pt x="5944669" y="928500"/>
-                  </a:lnTo>
-                  <a:lnTo>
-                    <a:pt x="6016292" y="908100"/>
-                  </a:lnTo>
-                  <a:lnTo>
-                    <a:pt x="6087914" y="887408"/>
-                  </a:lnTo>
-                  <a:lnTo>
-                    <a:pt x="6159537" y="866422"/>
-                  </a:lnTo>
-                  <a:lnTo>
-                    <a:pt x="6231159" y="845136"/>
-                  </a:lnTo>
-                  <a:lnTo>
-                    <a:pt x="6302782" y="823547"/>
-                  </a:lnTo>
-                  <a:lnTo>
-                    <a:pt x="6374404" y="801649"/>
-                  </a:lnTo>
-                  <a:lnTo>
-                    <a:pt x="6446027" y="779439"/>
-                  </a:lnTo>
-                  <a:lnTo>
-                    <a:pt x="6517649" y="756912"/>
-                  </a:lnTo>
-                  <a:lnTo>
-                    <a:pt x="6589272" y="734064"/>
-                  </a:lnTo>
-                  <a:lnTo>
-                    <a:pt x="6660894" y="710890"/>
-                  </a:lnTo>
-                  <a:lnTo>
-                    <a:pt x="6732517" y="687385"/>
-                  </a:lnTo>
-                  <a:lnTo>
-                    <a:pt x="6804139" y="663545"/>
-                  </a:lnTo>
-                  <a:lnTo>
-                    <a:pt x="6875762" y="639364"/>
-                  </a:lnTo>
-                  <a:lnTo>
-                    <a:pt x="6947385" y="614839"/>
-                  </a:lnTo>
-                  <a:lnTo>
-                    <a:pt x="7019007" y="589964"/>
-                  </a:lnTo>
-                  <a:lnTo>
-                    <a:pt x="7090630" y="564733"/>
+                    <a:pt x="71622" y="54707"/>
+                  </a:lnTo>
+                  <a:lnTo>
+                    <a:pt x="143245" y="108147"/>
+                  </a:lnTo>
+                  <a:lnTo>
+                    <a:pt x="214867" y="160349"/>
+                  </a:lnTo>
+                  <a:lnTo>
+                    <a:pt x="286490" y="211342"/>
+                  </a:lnTo>
+                  <a:lnTo>
+                    <a:pt x="358112" y="261153"/>
+                  </a:lnTo>
+                  <a:lnTo>
+                    <a:pt x="429735" y="309810"/>
+                  </a:lnTo>
+                  <a:lnTo>
+                    <a:pt x="501357" y="357339"/>
+                  </a:lnTo>
+                  <a:lnTo>
+                    <a:pt x="572980" y="403767"/>
+                  </a:lnTo>
+                  <a:lnTo>
+                    <a:pt x="644602" y="449120"/>
+                  </a:lnTo>
+                  <a:lnTo>
+                    <a:pt x="716225" y="493422"/>
+                  </a:lnTo>
+                  <a:lnTo>
+                    <a:pt x="787847" y="536697"/>
+                  </a:lnTo>
+                  <a:lnTo>
+                    <a:pt x="859470" y="578969"/>
+                  </a:lnTo>
+                  <a:lnTo>
+                    <a:pt x="931092" y="620262"/>
+                  </a:lnTo>
+                  <a:lnTo>
+                    <a:pt x="1002715" y="660598"/>
+                  </a:lnTo>
+                  <a:lnTo>
+                    <a:pt x="1074337" y="700000"/>
+                  </a:lnTo>
+                  <a:lnTo>
+                    <a:pt x="1145960" y="738489"/>
+                  </a:lnTo>
+                  <a:lnTo>
+                    <a:pt x="1217582" y="776086"/>
+                  </a:lnTo>
+                  <a:lnTo>
+                    <a:pt x="1289205" y="812812"/>
+                  </a:lnTo>
+                  <a:lnTo>
+                    <a:pt x="1360827" y="848687"/>
+                  </a:lnTo>
+                  <a:lnTo>
+                    <a:pt x="1432450" y="883730"/>
+                  </a:lnTo>
+                  <a:lnTo>
+                    <a:pt x="1504073" y="917962"/>
+                  </a:lnTo>
+                  <a:lnTo>
+                    <a:pt x="1575695" y="951401"/>
+                  </a:lnTo>
+                  <a:lnTo>
+                    <a:pt x="1647318" y="984064"/>
+                  </a:lnTo>
+                  <a:lnTo>
+                    <a:pt x="1718940" y="1015971"/>
+                  </a:lnTo>
+                  <a:lnTo>
+                    <a:pt x="1790563" y="1047139"/>
+                  </a:lnTo>
+                  <a:lnTo>
+                    <a:pt x="1862185" y="1077585"/>
+                  </a:lnTo>
+                  <a:lnTo>
+                    <a:pt x="1933808" y="1107325"/>
+                  </a:lnTo>
+                  <a:lnTo>
+                    <a:pt x="2005430" y="1136376"/>
+                  </a:lnTo>
+                  <a:lnTo>
+                    <a:pt x="2077053" y="1164754"/>
+                  </a:lnTo>
+                  <a:lnTo>
+                    <a:pt x="2148675" y="1192474"/>
+                  </a:lnTo>
+                  <a:lnTo>
+                    <a:pt x="2220298" y="1219552"/>
+                  </a:lnTo>
+                  <a:lnTo>
+                    <a:pt x="2291920" y="1246003"/>
+                  </a:lnTo>
+                  <a:lnTo>
+                    <a:pt x="2363543" y="1271841"/>
+                  </a:lnTo>
+                  <a:lnTo>
+                    <a:pt x="2435165" y="1297080"/>
+                  </a:lnTo>
+                  <a:lnTo>
+                    <a:pt x="2506788" y="1321734"/>
+                  </a:lnTo>
+                  <a:lnTo>
+                    <a:pt x="2578410" y="1345817"/>
+                  </a:lnTo>
+                  <a:lnTo>
+                    <a:pt x="2650033" y="1369343"/>
+                  </a:lnTo>
+                  <a:lnTo>
+                    <a:pt x="2721655" y="1392323"/>
+                  </a:lnTo>
+                  <a:lnTo>
+                    <a:pt x="2793278" y="1414770"/>
+                  </a:lnTo>
+                  <a:lnTo>
+                    <a:pt x="2864901" y="1436698"/>
+                  </a:lnTo>
+                  <a:lnTo>
+                    <a:pt x="2936523" y="1458117"/>
+                  </a:lnTo>
+                  <a:lnTo>
+                    <a:pt x="3008146" y="1479040"/>
+                  </a:lnTo>
+                  <a:lnTo>
+                    <a:pt x="3079768" y="1499479"/>
+                  </a:lnTo>
+                  <a:lnTo>
+                    <a:pt x="3151391" y="1519444"/>
+                  </a:lnTo>
+                  <a:lnTo>
+                    <a:pt x="3223013" y="1527200"/>
+                  </a:lnTo>
+                  <a:lnTo>
+                    <a:pt x="3294636" y="1515142"/>
+                  </a:lnTo>
+                  <a:lnTo>
+                    <a:pt x="3366258" y="1502910"/>
+                  </a:lnTo>
+                  <a:lnTo>
+                    <a:pt x="3437881" y="1490501"/>
+                  </a:lnTo>
+                  <a:lnTo>
+                    <a:pt x="3509503" y="1477912"/>
+                  </a:lnTo>
+                  <a:lnTo>
+                    <a:pt x="3581126" y="1465141"/>
+                  </a:lnTo>
+                  <a:lnTo>
+                    <a:pt x="3652748" y="1452186"/>
+                  </a:lnTo>
+                  <a:lnTo>
+                    <a:pt x="3724371" y="1439043"/>
+                  </a:lnTo>
+                  <a:lnTo>
+                    <a:pt x="3795993" y="1425711"/>
+                  </a:lnTo>
+                  <a:lnTo>
+                    <a:pt x="3867616" y="1412185"/>
+                  </a:lnTo>
+                  <a:lnTo>
+                    <a:pt x="3939238" y="1398464"/>
+                  </a:lnTo>
+                  <a:lnTo>
+                    <a:pt x="4010861" y="1384545"/>
+                  </a:lnTo>
+                  <a:lnTo>
+                    <a:pt x="4082483" y="1370424"/>
+                  </a:lnTo>
+                  <a:lnTo>
+                    <a:pt x="4154106" y="1356099"/>
+                  </a:lnTo>
+                  <a:lnTo>
+                    <a:pt x="4225729" y="1341567"/>
+                  </a:lnTo>
+                  <a:lnTo>
+                    <a:pt x="4297351" y="1326825"/>
+                  </a:lnTo>
+                  <a:lnTo>
+                    <a:pt x="4368974" y="1311870"/>
+                  </a:lnTo>
+                  <a:lnTo>
+                    <a:pt x="4440596" y="1296698"/>
+                  </a:lnTo>
+                  <a:lnTo>
+                    <a:pt x="4512219" y="1281307"/>
+                  </a:lnTo>
+                  <a:lnTo>
+                    <a:pt x="4583841" y="1265694"/>
+                  </a:lnTo>
+                  <a:lnTo>
+                    <a:pt x="4655464" y="1249855"/>
+                  </a:lnTo>
+                  <a:lnTo>
+                    <a:pt x="4727086" y="1233787"/>
+                  </a:lnTo>
+                  <a:lnTo>
+                    <a:pt x="4798709" y="1217486"/>
+                  </a:lnTo>
+                  <a:lnTo>
+                    <a:pt x="4870331" y="1200950"/>
+                  </a:lnTo>
+                  <a:lnTo>
+                    <a:pt x="4941954" y="1184175"/>
+                  </a:lnTo>
+                  <a:lnTo>
+                    <a:pt x="5013576" y="1167157"/>
+                  </a:lnTo>
+                  <a:lnTo>
+                    <a:pt x="5085199" y="1149893"/>
+                  </a:lnTo>
+                  <a:lnTo>
+                    <a:pt x="5156821" y="1132379"/>
+                  </a:lnTo>
+                  <a:lnTo>
+                    <a:pt x="5228444" y="1114613"/>
+                  </a:lnTo>
+                  <a:lnTo>
+                    <a:pt x="5300066" y="1096589"/>
+                  </a:lnTo>
+                  <a:lnTo>
+                    <a:pt x="5371689" y="1078305"/>
+                  </a:lnTo>
+                  <a:lnTo>
+                    <a:pt x="5443311" y="1059756"/>
+                  </a:lnTo>
+                  <a:lnTo>
+                    <a:pt x="5514934" y="1040939"/>
+                  </a:lnTo>
+                  <a:lnTo>
+                    <a:pt x="5586557" y="1021850"/>
+                  </a:lnTo>
+                  <a:lnTo>
+                    <a:pt x="5658179" y="1002485"/>
+                  </a:lnTo>
+                  <a:lnTo>
+                    <a:pt x="5729802" y="982840"/>
+                  </a:lnTo>
+                  <a:lnTo>
+                    <a:pt x="5801424" y="962912"/>
+                  </a:lnTo>
+                  <a:lnTo>
+                    <a:pt x="5873047" y="942694"/>
+                  </a:lnTo>
+                  <a:lnTo>
+                    <a:pt x="5944669" y="922185"/>
+                  </a:lnTo>
+                  <a:lnTo>
+                    <a:pt x="6016292" y="901379"/>
+                  </a:lnTo>
+                  <a:lnTo>
+                    <a:pt x="6087914" y="880272"/>
+                  </a:lnTo>
+                  <a:lnTo>
+                    <a:pt x="6159537" y="858860"/>
+                  </a:lnTo>
+                  <a:lnTo>
+                    <a:pt x="6231159" y="837139"/>
+                  </a:lnTo>
+                  <a:lnTo>
+                    <a:pt x="6302782" y="815103"/>
+                  </a:lnTo>
+                  <a:lnTo>
+                    <a:pt x="6374404" y="792749"/>
+                  </a:lnTo>
+                  <a:lnTo>
+                    <a:pt x="6446027" y="770071"/>
+                  </a:lnTo>
+                  <a:lnTo>
+                    <a:pt x="6517649" y="747066"/>
+                  </a:lnTo>
+                  <a:lnTo>
+                    <a:pt x="6589272" y="723728"/>
+                  </a:lnTo>
+                  <a:lnTo>
+                    <a:pt x="6660894" y="700052"/>
+                  </a:lnTo>
+                  <a:lnTo>
+                    <a:pt x="6732517" y="676035"/>
+                  </a:lnTo>
+                  <a:lnTo>
+                    <a:pt x="6804139" y="651669"/>
+                  </a:lnTo>
+                  <a:lnTo>
+                    <a:pt x="6875762" y="626952"/>
+                  </a:lnTo>
+                  <a:lnTo>
+                    <a:pt x="6947385" y="601877"/>
+                  </a:lnTo>
+                  <a:lnTo>
+                    <a:pt x="7019007" y="576440"/>
+                  </a:lnTo>
+                  <a:lnTo>
+                    <a:pt x="7090630" y="550635"/>
                   </a:lnTo>
                 </a:path>
               </a:pathLst>
@@ -3958,312 +3958,312 @@
           </p:nvSpPr>
           <p:spPr>
             <a:xfrm>
-              <a:off x="1172049" y="4734395"/>
-              <a:ext cx="7090630" cy="591391"/>
+              <a:off x="1172049" y="4735051"/>
+              <a:ext cx="7090630" cy="590351"/>
             </a:xfrm>
             <a:custGeom>
               <a:avLst/>
               <a:pathLst>
-                <a:path w="7090630" h="591391">
+                <a:path w="7090630" h="590351">
                   <a:moveTo>
-                    <a:pt x="7090630" y="591391"/>
+                    <a:pt x="7090630" y="590351"/>
                   </a:moveTo>
                   <a:lnTo>
-                    <a:pt x="7019007" y="585899"/>
-                  </a:lnTo>
-                  <a:lnTo>
-                    <a:pt x="6947385" y="580278"/>
-                  </a:lnTo>
-                  <a:lnTo>
-                    <a:pt x="6875762" y="574523"/>
-                  </a:lnTo>
-                  <a:lnTo>
-                    <a:pt x="6804139" y="568631"/>
-                  </a:lnTo>
-                  <a:lnTo>
-                    <a:pt x="6732517" y="562600"/>
-                  </a:lnTo>
-                  <a:lnTo>
-                    <a:pt x="6660894" y="556426"/>
-                  </a:lnTo>
-                  <a:lnTo>
-                    <a:pt x="6589272" y="550105"/>
-                  </a:lnTo>
-                  <a:lnTo>
-                    <a:pt x="6517649" y="543634"/>
-                  </a:lnTo>
-                  <a:lnTo>
-                    <a:pt x="6446027" y="537010"/>
-                  </a:lnTo>
-                  <a:lnTo>
-                    <a:pt x="6374404" y="530229"/>
-                  </a:lnTo>
-                  <a:lnTo>
-                    <a:pt x="6302782" y="523286"/>
-                  </a:lnTo>
-                  <a:lnTo>
-                    <a:pt x="6231159" y="516179"/>
-                  </a:lnTo>
-                  <a:lnTo>
-                    <a:pt x="6159537" y="508904"/>
-                  </a:lnTo>
-                  <a:lnTo>
-                    <a:pt x="6087914" y="501455"/>
-                  </a:lnTo>
-                  <a:lnTo>
-                    <a:pt x="6016292" y="493830"/>
-                  </a:lnTo>
-                  <a:lnTo>
-                    <a:pt x="5944669" y="486024"/>
-                  </a:lnTo>
-                  <a:lnTo>
-                    <a:pt x="5873047" y="478033"/>
-                  </a:lnTo>
-                  <a:lnTo>
-                    <a:pt x="5801424" y="469853"/>
-                  </a:lnTo>
-                  <a:lnTo>
-                    <a:pt x="5729802" y="461478"/>
-                  </a:lnTo>
-                  <a:lnTo>
-                    <a:pt x="5658179" y="452905"/>
-                  </a:lnTo>
-                  <a:lnTo>
-                    <a:pt x="5586557" y="444128"/>
-                  </a:lnTo>
-                  <a:lnTo>
-                    <a:pt x="5514934" y="435143"/>
-                  </a:lnTo>
-                  <a:lnTo>
-                    <a:pt x="5443311" y="425945"/>
-                  </a:lnTo>
-                  <a:lnTo>
-                    <a:pt x="5371689" y="416528"/>
-                  </a:lnTo>
-                  <a:lnTo>
-                    <a:pt x="5300066" y="406889"/>
-                  </a:lnTo>
-                  <a:lnTo>
-                    <a:pt x="5228444" y="397020"/>
-                  </a:lnTo>
-                  <a:lnTo>
-                    <a:pt x="5156821" y="386918"/>
-                  </a:lnTo>
-                  <a:lnTo>
-                    <a:pt x="5085199" y="376575"/>
-                  </a:lnTo>
-                  <a:lnTo>
-                    <a:pt x="5013576" y="365988"/>
-                  </a:lnTo>
-                  <a:lnTo>
-                    <a:pt x="4941954" y="355149"/>
-                  </a:lnTo>
-                  <a:lnTo>
-                    <a:pt x="4870331" y="344053"/>
-                  </a:lnTo>
-                  <a:lnTo>
-                    <a:pt x="4798709" y="332694"/>
-                  </a:lnTo>
-                  <a:lnTo>
-                    <a:pt x="4727086" y="321065"/>
-                  </a:lnTo>
-                  <a:lnTo>
-                    <a:pt x="4655464" y="309160"/>
-                  </a:lnTo>
-                  <a:lnTo>
-                    <a:pt x="4583841" y="296973"/>
-                  </a:lnTo>
-                  <a:lnTo>
-                    <a:pt x="4512219" y="284497"/>
-                  </a:lnTo>
-                  <a:lnTo>
-                    <a:pt x="4440596" y="271725"/>
-                  </a:lnTo>
-                  <a:lnTo>
-                    <a:pt x="4368974" y="258650"/>
-                  </a:lnTo>
-                  <a:lnTo>
-                    <a:pt x="4297351" y="245265"/>
-                  </a:lnTo>
-                  <a:lnTo>
-                    <a:pt x="4225729" y="231562"/>
-                  </a:lnTo>
-                  <a:lnTo>
-                    <a:pt x="4154106" y="217534"/>
-                  </a:lnTo>
-                  <a:lnTo>
-                    <a:pt x="4082483" y="203173"/>
-                  </a:lnTo>
-                  <a:lnTo>
-                    <a:pt x="4010861" y="188471"/>
-                  </a:lnTo>
-                  <a:lnTo>
-                    <a:pt x="3939238" y="173421"/>
-                  </a:lnTo>
-                  <a:lnTo>
-                    <a:pt x="3867616" y="158014"/>
-                  </a:lnTo>
-                  <a:lnTo>
-                    <a:pt x="3795993" y="142241"/>
-                  </a:lnTo>
-                  <a:lnTo>
-                    <a:pt x="3724371" y="126094"/>
-                  </a:lnTo>
-                  <a:lnTo>
-                    <a:pt x="3652748" y="109564"/>
-                  </a:lnTo>
-                  <a:lnTo>
-                    <a:pt x="3581126" y="92642"/>
-                  </a:lnTo>
-                  <a:lnTo>
-                    <a:pt x="3509503" y="75318"/>
-                  </a:lnTo>
-                  <a:lnTo>
-                    <a:pt x="3437881" y="57583"/>
-                  </a:lnTo>
-                  <a:lnTo>
-                    <a:pt x="3366258" y="39428"/>
-                  </a:lnTo>
-                  <a:lnTo>
-                    <a:pt x="3294636" y="20841"/>
-                  </a:lnTo>
-                  <a:lnTo>
-                    <a:pt x="3223013" y="1814"/>
-                  </a:lnTo>
-                  <a:lnTo>
-                    <a:pt x="3151391" y="0"/>
-                  </a:lnTo>
-                  <a:lnTo>
-                    <a:pt x="3079768" y="11575"/>
-                  </a:lnTo>
-                  <a:lnTo>
-                    <a:pt x="3008146" y="22987"/>
-                  </a:lnTo>
-                  <a:lnTo>
-                    <a:pt x="2936523" y="34239"/>
-                  </a:lnTo>
-                  <a:lnTo>
-                    <a:pt x="2864901" y="45332"/>
-                  </a:lnTo>
-                  <a:lnTo>
-                    <a:pt x="2793278" y="56270"/>
-                  </a:lnTo>
-                  <a:lnTo>
-                    <a:pt x="2721655" y="67053"/>
-                  </a:lnTo>
-                  <a:lnTo>
-                    <a:pt x="2650033" y="77685"/>
-                  </a:lnTo>
-                  <a:lnTo>
-                    <a:pt x="2578410" y="88168"/>
-                  </a:lnTo>
-                  <a:lnTo>
-                    <a:pt x="2506788" y="98502"/>
-                  </a:lnTo>
-                  <a:lnTo>
-                    <a:pt x="2435165" y="108692"/>
-                  </a:lnTo>
-                  <a:lnTo>
-                    <a:pt x="2363543" y="118738"/>
-                  </a:lnTo>
-                  <a:lnTo>
-                    <a:pt x="2291920" y="128643"/>
-                  </a:lnTo>
-                  <a:lnTo>
-                    <a:pt x="2220298" y="138408"/>
-                  </a:lnTo>
-                  <a:lnTo>
-                    <a:pt x="2148675" y="148037"/>
-                  </a:lnTo>
-                  <a:lnTo>
-                    <a:pt x="2077053" y="157529"/>
-                  </a:lnTo>
-                  <a:lnTo>
-                    <a:pt x="2005430" y="166889"/>
-                  </a:lnTo>
-                  <a:lnTo>
-                    <a:pt x="1933808" y="176116"/>
-                  </a:lnTo>
-                  <a:lnTo>
-                    <a:pt x="1862185" y="185214"/>
-                  </a:lnTo>
-                  <a:lnTo>
-                    <a:pt x="1790563" y="194183"/>
-                  </a:lnTo>
-                  <a:lnTo>
-                    <a:pt x="1718940" y="203027"/>
-                  </a:lnTo>
-                  <a:lnTo>
-                    <a:pt x="1647318" y="211746"/>
-                  </a:lnTo>
-                  <a:lnTo>
-                    <a:pt x="1575695" y="220343"/>
-                  </a:lnTo>
-                  <a:lnTo>
-                    <a:pt x="1504073" y="228818"/>
-                  </a:lnTo>
-                  <a:lnTo>
-                    <a:pt x="1432450" y="237175"/>
-                  </a:lnTo>
-                  <a:lnTo>
-                    <a:pt x="1360827" y="245413"/>
-                  </a:lnTo>
-                  <a:lnTo>
-                    <a:pt x="1289205" y="253536"/>
-                  </a:lnTo>
-                  <a:lnTo>
-                    <a:pt x="1217582" y="261545"/>
-                  </a:lnTo>
-                  <a:lnTo>
-                    <a:pt x="1145960" y="269441"/>
-                  </a:lnTo>
-                  <a:lnTo>
-                    <a:pt x="1074337" y="277226"/>
-                  </a:lnTo>
-                  <a:lnTo>
-                    <a:pt x="1002715" y="284901"/>
-                  </a:lnTo>
-                  <a:lnTo>
-                    <a:pt x="931092" y="292469"/>
-                  </a:lnTo>
-                  <a:lnTo>
-                    <a:pt x="859470" y="299930"/>
-                  </a:lnTo>
-                  <a:lnTo>
-                    <a:pt x="787847" y="307286"/>
-                  </a:lnTo>
-                  <a:lnTo>
-                    <a:pt x="716225" y="314538"/>
-                  </a:lnTo>
-                  <a:lnTo>
-                    <a:pt x="644602" y="321689"/>
-                  </a:lnTo>
-                  <a:lnTo>
-                    <a:pt x="572980" y="328739"/>
-                  </a:lnTo>
-                  <a:lnTo>
-                    <a:pt x="501357" y="335689"/>
-                  </a:lnTo>
-                  <a:lnTo>
-                    <a:pt x="429735" y="342542"/>
-                  </a:lnTo>
-                  <a:lnTo>
-                    <a:pt x="358112" y="349299"/>
-                  </a:lnTo>
-                  <a:lnTo>
-                    <a:pt x="286490" y="355960"/>
-                  </a:lnTo>
-                  <a:lnTo>
-                    <a:pt x="214867" y="362528"/>
-                  </a:lnTo>
-                  <a:lnTo>
-                    <a:pt x="143245" y="369004"/>
-                  </a:lnTo>
-                  <a:lnTo>
-                    <a:pt x="71622" y="375388"/>
-                  </a:lnTo>
-                  <a:lnTo>
-                    <a:pt x="0" y="381683"/>
+                    <a:pt x="7019007" y="584852"/>
+                  </a:lnTo>
+                  <a:lnTo>
+                    <a:pt x="6947385" y="579222"/>
+                  </a:lnTo>
+                  <a:lnTo>
+                    <a:pt x="6875762" y="573459"/>
+                  </a:lnTo>
+                  <a:lnTo>
+                    <a:pt x="6804139" y="567559"/>
+                  </a:lnTo>
+                  <a:lnTo>
+                    <a:pt x="6732517" y="561519"/>
+                  </a:lnTo>
+                  <a:lnTo>
+                    <a:pt x="6660894" y="555335"/>
+                  </a:lnTo>
+                  <a:lnTo>
+                    <a:pt x="6589272" y="549006"/>
+                  </a:lnTo>
+                  <a:lnTo>
+                    <a:pt x="6517649" y="542526"/>
+                  </a:lnTo>
+                  <a:lnTo>
+                    <a:pt x="6446027" y="535892"/>
+                  </a:lnTo>
+                  <a:lnTo>
+                    <a:pt x="6374404" y="529101"/>
+                  </a:lnTo>
+                  <a:lnTo>
+                    <a:pt x="6302782" y="522149"/>
+                  </a:lnTo>
+                  <a:lnTo>
+                    <a:pt x="6231159" y="515032"/>
+                  </a:lnTo>
+                  <a:lnTo>
+                    <a:pt x="6159537" y="507746"/>
+                  </a:lnTo>
+                  <a:lnTo>
+                    <a:pt x="6087914" y="500287"/>
+                  </a:lnTo>
+                  <a:lnTo>
+                    <a:pt x="6016292" y="492651"/>
+                  </a:lnTo>
+                  <a:lnTo>
+                    <a:pt x="5944669" y="484835"/>
+                  </a:lnTo>
+                  <a:lnTo>
+                    <a:pt x="5873047" y="476833"/>
+                  </a:lnTo>
+                  <a:lnTo>
+                    <a:pt x="5801424" y="468641"/>
+                  </a:lnTo>
+                  <a:lnTo>
+                    <a:pt x="5729802" y="460254"/>
+                  </a:lnTo>
+                  <a:lnTo>
+                    <a:pt x="5658179" y="451669"/>
+                  </a:lnTo>
+                  <a:lnTo>
+                    <a:pt x="5586557" y="442880"/>
+                  </a:lnTo>
+                  <a:lnTo>
+                    <a:pt x="5514934" y="433883"/>
+                  </a:lnTo>
+                  <a:lnTo>
+                    <a:pt x="5443311" y="424672"/>
+                  </a:lnTo>
+                  <a:lnTo>
+                    <a:pt x="5371689" y="415243"/>
+                  </a:lnTo>
+                  <a:lnTo>
+                    <a:pt x="5300066" y="405591"/>
+                  </a:lnTo>
+                  <a:lnTo>
+                    <a:pt x="5228444" y="395709"/>
+                  </a:lnTo>
+                  <a:lnTo>
+                    <a:pt x="5156821" y="385593"/>
+                  </a:lnTo>
+                  <a:lnTo>
+                    <a:pt x="5085199" y="375237"/>
+                  </a:lnTo>
+                  <a:lnTo>
+                    <a:pt x="5013576" y="364635"/>
+                  </a:lnTo>
+                  <a:lnTo>
+                    <a:pt x="4941954" y="353782"/>
+                  </a:lnTo>
+                  <a:lnTo>
+                    <a:pt x="4870331" y="342671"/>
+                  </a:lnTo>
+                  <a:lnTo>
+                    <a:pt x="4798709" y="331297"/>
+                  </a:lnTo>
+                  <a:lnTo>
+                    <a:pt x="4727086" y="319653"/>
+                  </a:lnTo>
+                  <a:lnTo>
+                    <a:pt x="4655464" y="307733"/>
+                  </a:lnTo>
+                  <a:lnTo>
+                    <a:pt x="4583841" y="295530"/>
+                  </a:lnTo>
+                  <a:lnTo>
+                    <a:pt x="4512219" y="283037"/>
+                  </a:lnTo>
+                  <a:lnTo>
+                    <a:pt x="4440596" y="270249"/>
+                  </a:lnTo>
+                  <a:lnTo>
+                    <a:pt x="4368974" y="257157"/>
+                  </a:lnTo>
+                  <a:lnTo>
+                    <a:pt x="4297351" y="243754"/>
+                  </a:lnTo>
+                  <a:lnTo>
+                    <a:pt x="4225729" y="230033"/>
+                  </a:lnTo>
+                  <a:lnTo>
+                    <a:pt x="4154106" y="215988"/>
+                  </a:lnTo>
+                  <a:lnTo>
+                    <a:pt x="4082483" y="201609"/>
+                  </a:lnTo>
+                  <a:lnTo>
+                    <a:pt x="4010861" y="186888"/>
+                  </a:lnTo>
+                  <a:lnTo>
+                    <a:pt x="3939238" y="171819"/>
+                  </a:lnTo>
+                  <a:lnTo>
+                    <a:pt x="3867616" y="156392"/>
+                  </a:lnTo>
+                  <a:lnTo>
+                    <a:pt x="3795993" y="140600"/>
+                  </a:lnTo>
+                  <a:lnTo>
+                    <a:pt x="3724371" y="124432"/>
+                  </a:lnTo>
+                  <a:lnTo>
+                    <a:pt x="3652748" y="107882"/>
+                  </a:lnTo>
+                  <a:lnTo>
+                    <a:pt x="3581126" y="90938"/>
+                  </a:lnTo>
+                  <a:lnTo>
+                    <a:pt x="3509503" y="73593"/>
+                  </a:lnTo>
+                  <a:lnTo>
+                    <a:pt x="3437881" y="55837"/>
+                  </a:lnTo>
+                  <a:lnTo>
+                    <a:pt x="3366258" y="37659"/>
+                  </a:lnTo>
+                  <a:lnTo>
+                    <a:pt x="3294636" y="19050"/>
+                  </a:lnTo>
+                  <a:lnTo>
+                    <a:pt x="3223013" y="0"/>
+                  </a:lnTo>
+                  <a:lnTo>
+                    <a:pt x="3151391" y="140"/>
+                  </a:lnTo>
+                  <a:lnTo>
+                    <a:pt x="3079768" y="11857"/>
+                  </a:lnTo>
+                  <a:lnTo>
+                    <a:pt x="3008146" y="23407"/>
+                  </a:lnTo>
+                  <a:lnTo>
+                    <a:pt x="2936523" y="34792"/>
+                  </a:lnTo>
+                  <a:lnTo>
+                    <a:pt x="2864901" y="46015"/>
+                  </a:lnTo>
+                  <a:lnTo>
+                    <a:pt x="2793278" y="57078"/>
+                  </a:lnTo>
+                  <a:lnTo>
+                    <a:pt x="2721655" y="67983"/>
+                  </a:lnTo>
+                  <a:lnTo>
+                    <a:pt x="2650033" y="78733"/>
+                  </a:lnTo>
+                  <a:lnTo>
+                    <a:pt x="2578410" y="89329"/>
+                  </a:lnTo>
+                  <a:lnTo>
+                    <a:pt x="2506788" y="99775"/>
+                  </a:lnTo>
+                  <a:lnTo>
+                    <a:pt x="2435165" y="110071"/>
+                  </a:lnTo>
+                  <a:lnTo>
+                    <a:pt x="2363543" y="120221"/>
+                  </a:lnTo>
+                  <a:lnTo>
+                    <a:pt x="2291920" y="130227"/>
+                  </a:lnTo>
+                  <a:lnTo>
+                    <a:pt x="2220298" y="140089"/>
+                  </a:lnTo>
+                  <a:lnTo>
+                    <a:pt x="2148675" y="149811"/>
+                  </a:lnTo>
+                  <a:lnTo>
+                    <a:pt x="2077053" y="159395"/>
+                  </a:lnTo>
+                  <a:lnTo>
+                    <a:pt x="2005430" y="168842"/>
+                  </a:lnTo>
+                  <a:lnTo>
+                    <a:pt x="1933808" y="178154"/>
+                  </a:lnTo>
+                  <a:lnTo>
+                    <a:pt x="1862185" y="187334"/>
+                  </a:lnTo>
+                  <a:lnTo>
+                    <a:pt x="1790563" y="196382"/>
+                  </a:lnTo>
+                  <a:lnTo>
+                    <a:pt x="1718940" y="205302"/>
+                  </a:lnTo>
+                  <a:lnTo>
+                    <a:pt x="1647318" y="214095"/>
+                  </a:lnTo>
+                  <a:lnTo>
+                    <a:pt x="1575695" y="222762"/>
+                  </a:lnTo>
+                  <a:lnTo>
+                    <a:pt x="1504073" y="231306"/>
+                  </a:lnTo>
+                  <a:lnTo>
+                    <a:pt x="1432450" y="239728"/>
+                  </a:lnTo>
+                  <a:lnTo>
+                    <a:pt x="1360827" y="248029"/>
+                  </a:lnTo>
+                  <a:lnTo>
+                    <a:pt x="1289205" y="256213"/>
+                  </a:lnTo>
+                  <a:lnTo>
+                    <a:pt x="1217582" y="264280"/>
+                  </a:lnTo>
+                  <a:lnTo>
+                    <a:pt x="1145960" y="272232"/>
+                  </a:lnTo>
+                  <a:lnTo>
+                    <a:pt x="1074337" y="280071"/>
+                  </a:lnTo>
+                  <a:lnTo>
+                    <a:pt x="1002715" y="287798"/>
+                  </a:lnTo>
+                  <a:lnTo>
+                    <a:pt x="931092" y="295414"/>
+                  </a:lnTo>
+                  <a:lnTo>
+                    <a:pt x="859470" y="302923"/>
+                  </a:lnTo>
+                  <a:lnTo>
+                    <a:pt x="787847" y="310324"/>
+                  </a:lnTo>
+                  <a:lnTo>
+                    <a:pt x="716225" y="317620"/>
+                  </a:lnTo>
+                  <a:lnTo>
+                    <a:pt x="644602" y="324811"/>
+                  </a:lnTo>
+                  <a:lnTo>
+                    <a:pt x="572980" y="331900"/>
+                  </a:lnTo>
+                  <a:lnTo>
+                    <a:pt x="501357" y="338889"/>
+                  </a:lnTo>
+                  <a:lnTo>
+                    <a:pt x="429735" y="345777"/>
+                  </a:lnTo>
+                  <a:lnTo>
+                    <a:pt x="358112" y="352568"/>
+                  </a:lnTo>
+                  <a:lnTo>
+                    <a:pt x="286490" y="359261"/>
+                  </a:lnTo>
+                  <a:lnTo>
+                    <a:pt x="214867" y="365860"/>
+                  </a:lnTo>
+                  <a:lnTo>
+                    <a:pt x="143245" y="372364"/>
+                  </a:lnTo>
+                  <a:lnTo>
+                    <a:pt x="71622" y="378775"/>
+                  </a:lnTo>
+                  <a:lnTo>
+                    <a:pt x="0" y="385095"/>
                   </a:lnTo>
                 </a:path>
               </a:pathLst>
@@ -4283,312 +4283,312 @@
           </p:nvSpPr>
           <p:spPr>
             <a:xfrm>
-              <a:off x="1172049" y="4537242"/>
-              <a:ext cx="7090630" cy="375689"/>
+              <a:off x="1172049" y="4541344"/>
+              <a:ext cx="7090630" cy="368015"/>
             </a:xfrm>
             <a:custGeom>
               <a:avLst/>
               <a:pathLst>
-                <a:path w="7090630" h="375689">
+                <a:path w="7090630" h="368015">
                   <a:moveTo>
                     <a:pt x="0" y="0"/>
                   </a:moveTo>
                   <a:lnTo>
-                    <a:pt x="71622" y="4722"/>
-                  </a:lnTo>
-                  <a:lnTo>
-                    <a:pt x="143245" y="9422"/>
-                  </a:lnTo>
-                  <a:lnTo>
-                    <a:pt x="214867" y="14100"/>
-                  </a:lnTo>
-                  <a:lnTo>
-                    <a:pt x="286490" y="18757"/>
-                  </a:lnTo>
-                  <a:lnTo>
-                    <a:pt x="358112" y="23392"/>
-                  </a:lnTo>
-                  <a:lnTo>
-                    <a:pt x="429735" y="28006"/>
-                  </a:lnTo>
-                  <a:lnTo>
-                    <a:pt x="501357" y="32598"/>
-                  </a:lnTo>
-                  <a:lnTo>
-                    <a:pt x="572980" y="37169"/>
-                  </a:lnTo>
-                  <a:lnTo>
-                    <a:pt x="644602" y="41719"/>
-                  </a:lnTo>
-                  <a:lnTo>
-                    <a:pt x="716225" y="46248"/>
-                  </a:lnTo>
-                  <a:lnTo>
-                    <a:pt x="787847" y="50756"/>
-                  </a:lnTo>
-                  <a:lnTo>
-                    <a:pt x="859470" y="55243"/>
-                  </a:lnTo>
-                  <a:lnTo>
-                    <a:pt x="931092" y="59709"/>
-                  </a:lnTo>
-                  <a:lnTo>
-                    <a:pt x="1002715" y="64155"/>
-                  </a:lnTo>
-                  <a:lnTo>
-                    <a:pt x="1074337" y="68580"/>
-                  </a:lnTo>
-                  <a:lnTo>
-                    <a:pt x="1145960" y="72984"/>
-                  </a:lnTo>
-                  <a:lnTo>
-                    <a:pt x="1217582" y="77368"/>
-                  </a:lnTo>
-                  <a:lnTo>
-                    <a:pt x="1289205" y="81732"/>
-                  </a:lnTo>
-                  <a:lnTo>
-                    <a:pt x="1360827" y="86076"/>
-                  </a:lnTo>
-                  <a:lnTo>
-                    <a:pt x="1432450" y="90399"/>
-                  </a:lnTo>
-                  <a:lnTo>
-                    <a:pt x="1504073" y="94703"/>
-                  </a:lnTo>
-                  <a:lnTo>
-                    <a:pt x="1575695" y="98987"/>
-                  </a:lnTo>
-                  <a:lnTo>
-                    <a:pt x="1647318" y="103250"/>
-                  </a:lnTo>
-                  <a:lnTo>
-                    <a:pt x="1718940" y="107494"/>
-                  </a:lnTo>
-                  <a:lnTo>
-                    <a:pt x="1790563" y="111719"/>
-                  </a:lnTo>
-                  <a:lnTo>
-                    <a:pt x="1862185" y="115924"/>
-                  </a:lnTo>
-                  <a:lnTo>
-                    <a:pt x="1933808" y="120109"/>
-                  </a:lnTo>
-                  <a:lnTo>
-                    <a:pt x="2005430" y="124275"/>
-                  </a:lnTo>
-                  <a:lnTo>
-                    <a:pt x="2077053" y="128422"/>
-                  </a:lnTo>
-                  <a:lnTo>
-                    <a:pt x="2148675" y="132549"/>
-                  </a:lnTo>
-                  <a:lnTo>
-                    <a:pt x="2220298" y="136657"/>
-                  </a:lnTo>
-                  <a:lnTo>
-                    <a:pt x="2291920" y="140747"/>
-                  </a:lnTo>
-                  <a:lnTo>
-                    <a:pt x="2363543" y="144817"/>
-                  </a:lnTo>
-                  <a:lnTo>
-                    <a:pt x="2435165" y="148869"/>
-                  </a:lnTo>
-                  <a:lnTo>
-                    <a:pt x="2506788" y="152902"/>
-                  </a:lnTo>
-                  <a:lnTo>
-                    <a:pt x="2578410" y="156916"/>
-                  </a:lnTo>
-                  <a:lnTo>
-                    <a:pt x="2650033" y="160911"/>
-                  </a:lnTo>
-                  <a:lnTo>
-                    <a:pt x="2721655" y="164888"/>
-                  </a:lnTo>
-                  <a:lnTo>
-                    <a:pt x="2793278" y="168847"/>
-                  </a:lnTo>
-                  <a:lnTo>
-                    <a:pt x="2864901" y="172788"/>
-                  </a:lnTo>
-                  <a:lnTo>
-                    <a:pt x="2936523" y="176710"/>
-                  </a:lnTo>
-                  <a:lnTo>
-                    <a:pt x="3008146" y="180614"/>
-                  </a:lnTo>
-                  <a:lnTo>
-                    <a:pt x="3079768" y="184499"/>
-                  </a:lnTo>
-                  <a:lnTo>
-                    <a:pt x="3151391" y="188367"/>
-                  </a:lnTo>
-                  <a:lnTo>
-                    <a:pt x="3223013" y="192217"/>
-                  </a:lnTo>
-                  <a:lnTo>
-                    <a:pt x="3294636" y="196049"/>
-                  </a:lnTo>
-                  <a:lnTo>
-                    <a:pt x="3366258" y="199864"/>
-                  </a:lnTo>
-                  <a:lnTo>
-                    <a:pt x="3437881" y="203661"/>
-                  </a:lnTo>
-                  <a:lnTo>
-                    <a:pt x="3509503" y="207440"/>
-                  </a:lnTo>
-                  <a:lnTo>
-                    <a:pt x="3581126" y="211202"/>
-                  </a:lnTo>
-                  <a:lnTo>
-                    <a:pt x="3652748" y="214946"/>
-                  </a:lnTo>
-                  <a:lnTo>
-                    <a:pt x="3724371" y="218673"/>
-                  </a:lnTo>
-                  <a:lnTo>
-                    <a:pt x="3795993" y="222382"/>
-                  </a:lnTo>
-                  <a:lnTo>
-                    <a:pt x="3867616" y="226075"/>
-                  </a:lnTo>
-                  <a:lnTo>
-                    <a:pt x="3939238" y="229750"/>
-                  </a:lnTo>
-                  <a:lnTo>
-                    <a:pt x="4010861" y="233409"/>
-                  </a:lnTo>
-                  <a:lnTo>
-                    <a:pt x="4082483" y="237050"/>
-                  </a:lnTo>
-                  <a:lnTo>
-                    <a:pt x="4154106" y="240675"/>
-                  </a:lnTo>
-                  <a:lnTo>
-                    <a:pt x="4225729" y="244283"/>
-                  </a:lnTo>
-                  <a:lnTo>
-                    <a:pt x="4297351" y="247874"/>
-                  </a:lnTo>
-                  <a:lnTo>
-                    <a:pt x="4368974" y="251448"/>
-                  </a:lnTo>
-                  <a:lnTo>
-                    <a:pt x="4440596" y="255006"/>
-                  </a:lnTo>
-                  <a:lnTo>
-                    <a:pt x="4512219" y="258548"/>
-                  </a:lnTo>
-                  <a:lnTo>
-                    <a:pt x="4583841" y="262073"/>
-                  </a:lnTo>
-                  <a:lnTo>
-                    <a:pt x="4655464" y="265582"/>
-                  </a:lnTo>
-                  <a:lnTo>
-                    <a:pt x="4727086" y="269074"/>
-                  </a:lnTo>
-                  <a:lnTo>
-                    <a:pt x="4798709" y="272550"/>
-                  </a:lnTo>
-                  <a:lnTo>
-                    <a:pt x="4870331" y="276011"/>
-                  </a:lnTo>
-                  <a:lnTo>
-                    <a:pt x="4941954" y="279455"/>
-                  </a:lnTo>
-                  <a:lnTo>
-                    <a:pt x="5013576" y="282883"/>
-                  </a:lnTo>
-                  <a:lnTo>
-                    <a:pt x="5085199" y="286296"/>
-                  </a:lnTo>
-                  <a:lnTo>
-                    <a:pt x="5156821" y="289692"/>
-                  </a:lnTo>
-                  <a:lnTo>
-                    <a:pt x="5228444" y="293073"/>
-                  </a:lnTo>
-                  <a:lnTo>
-                    <a:pt x="5300066" y="296439"/>
-                  </a:lnTo>
-                  <a:lnTo>
-                    <a:pt x="5371689" y="299788"/>
-                  </a:lnTo>
-                  <a:lnTo>
-                    <a:pt x="5443311" y="303122"/>
-                  </a:lnTo>
-                  <a:lnTo>
-                    <a:pt x="5514934" y="306441"/>
-                  </a:lnTo>
-                  <a:lnTo>
-                    <a:pt x="5586557" y="309745"/>
-                  </a:lnTo>
-                  <a:lnTo>
-                    <a:pt x="5658179" y="313033"/>
-                  </a:lnTo>
-                  <a:lnTo>
-                    <a:pt x="5729802" y="316305"/>
-                  </a:lnTo>
-                  <a:lnTo>
-                    <a:pt x="5801424" y="319563"/>
-                  </a:lnTo>
-                  <a:lnTo>
-                    <a:pt x="5873047" y="322806"/>
-                  </a:lnTo>
-                  <a:lnTo>
-                    <a:pt x="5944669" y="326033"/>
-                  </a:lnTo>
-                  <a:lnTo>
-                    <a:pt x="6016292" y="329246"/>
-                  </a:lnTo>
-                  <a:lnTo>
-                    <a:pt x="6087914" y="332444"/>
-                  </a:lnTo>
-                  <a:lnTo>
-                    <a:pt x="6159537" y="335627"/>
-                  </a:lnTo>
-                  <a:lnTo>
-                    <a:pt x="6231159" y="338795"/>
-                  </a:lnTo>
-                  <a:lnTo>
-                    <a:pt x="6302782" y="341949"/>
-                  </a:lnTo>
-                  <a:lnTo>
-                    <a:pt x="6374404" y="345088"/>
-                  </a:lnTo>
-                  <a:lnTo>
-                    <a:pt x="6446027" y="348212"/>
-                  </a:lnTo>
-                  <a:lnTo>
-                    <a:pt x="6517649" y="351322"/>
-                  </a:lnTo>
-                  <a:lnTo>
-                    <a:pt x="6589272" y="354418"/>
-                  </a:lnTo>
-                  <a:lnTo>
-                    <a:pt x="6660894" y="357499"/>
-                  </a:lnTo>
-                  <a:lnTo>
-                    <a:pt x="6732517" y="360566"/>
-                  </a:lnTo>
-                  <a:lnTo>
-                    <a:pt x="6804139" y="363619"/>
-                  </a:lnTo>
-                  <a:lnTo>
-                    <a:pt x="6875762" y="366658"/>
-                  </a:lnTo>
-                  <a:lnTo>
-                    <a:pt x="6947385" y="369682"/>
-                  </a:lnTo>
-                  <a:lnTo>
-                    <a:pt x="7019007" y="372693"/>
-                  </a:lnTo>
-                  <a:lnTo>
-                    <a:pt x="7090630" y="375689"/>
+                    <a:pt x="71622" y="4605"/>
+                  </a:lnTo>
+                  <a:lnTo>
+                    <a:pt x="143245" y="9189"/>
+                  </a:lnTo>
+                  <a:lnTo>
+                    <a:pt x="214867" y="13753"/>
+                  </a:lnTo>
+                  <a:lnTo>
+                    <a:pt x="286490" y="18296"/>
+                  </a:lnTo>
+                  <a:lnTo>
+                    <a:pt x="358112" y="22819"/>
+                  </a:lnTo>
+                  <a:lnTo>
+                    <a:pt x="429735" y="27320"/>
+                  </a:lnTo>
+                  <a:lnTo>
+                    <a:pt x="501357" y="31802"/>
+                  </a:lnTo>
+                  <a:lnTo>
+                    <a:pt x="572980" y="36263"/>
+                  </a:lnTo>
+                  <a:lnTo>
+                    <a:pt x="644602" y="40704"/>
+                  </a:lnTo>
+                  <a:lnTo>
+                    <a:pt x="716225" y="45125"/>
+                  </a:lnTo>
+                  <a:lnTo>
+                    <a:pt x="787847" y="49526"/>
+                  </a:lnTo>
+                  <a:lnTo>
+                    <a:pt x="859470" y="53907"/>
+                  </a:lnTo>
+                  <a:lnTo>
+                    <a:pt x="931092" y="58268"/>
+                  </a:lnTo>
+                  <a:lnTo>
+                    <a:pt x="1002715" y="62609"/>
+                  </a:lnTo>
+                  <a:lnTo>
+                    <a:pt x="1074337" y="66930"/>
+                  </a:lnTo>
+                  <a:lnTo>
+                    <a:pt x="1145960" y="71232"/>
+                  </a:lnTo>
+                  <a:lnTo>
+                    <a:pt x="1217582" y="75515"/>
+                  </a:lnTo>
+                  <a:lnTo>
+                    <a:pt x="1289205" y="79778"/>
+                  </a:lnTo>
+                  <a:lnTo>
+                    <a:pt x="1360827" y="84022"/>
+                  </a:lnTo>
+                  <a:lnTo>
+                    <a:pt x="1432450" y="88246"/>
+                  </a:lnTo>
+                  <a:lnTo>
+                    <a:pt x="1504073" y="92451"/>
+                  </a:lnTo>
+                  <a:lnTo>
+                    <a:pt x="1575695" y="96638"/>
+                  </a:lnTo>
+                  <a:lnTo>
+                    <a:pt x="1647318" y="100805"/>
+                  </a:lnTo>
+                  <a:lnTo>
+                    <a:pt x="1718940" y="104953"/>
+                  </a:lnTo>
+                  <a:lnTo>
+                    <a:pt x="1790563" y="109083"/>
+                  </a:lnTo>
+                  <a:lnTo>
+                    <a:pt x="1862185" y="113194"/>
+                  </a:lnTo>
+                  <a:lnTo>
+                    <a:pt x="1933808" y="117286"/>
+                  </a:lnTo>
+                  <a:lnTo>
+                    <a:pt x="2005430" y="121360"/>
+                  </a:lnTo>
+                  <a:lnTo>
+                    <a:pt x="2077053" y="125415"/>
+                  </a:lnTo>
+                  <a:lnTo>
+                    <a:pt x="2148675" y="129452"/>
+                  </a:lnTo>
+                  <a:lnTo>
+                    <a:pt x="2220298" y="133470"/>
+                  </a:lnTo>
+                  <a:lnTo>
+                    <a:pt x="2291920" y="137471"/>
+                  </a:lnTo>
+                  <a:lnTo>
+                    <a:pt x="2363543" y="141453"/>
+                  </a:lnTo>
+                  <a:lnTo>
+                    <a:pt x="2435165" y="145417"/>
+                  </a:lnTo>
+                  <a:lnTo>
+                    <a:pt x="2506788" y="149363"/>
+                  </a:lnTo>
+                  <a:lnTo>
+                    <a:pt x="2578410" y="153291"/>
+                  </a:lnTo>
+                  <a:lnTo>
+                    <a:pt x="2650033" y="157202"/>
+                  </a:lnTo>
+                  <a:lnTo>
+                    <a:pt x="2721655" y="161095"/>
+                  </a:lnTo>
+                  <a:lnTo>
+                    <a:pt x="2793278" y="164970"/>
+                  </a:lnTo>
+                  <a:lnTo>
+                    <a:pt x="2864901" y="168827"/>
+                  </a:lnTo>
+                  <a:lnTo>
+                    <a:pt x="2936523" y="172667"/>
+                  </a:lnTo>
+                  <a:lnTo>
+                    <a:pt x="3008146" y="176490"/>
+                  </a:lnTo>
+                  <a:lnTo>
+                    <a:pt x="3079768" y="180295"/>
+                  </a:lnTo>
+                  <a:lnTo>
+                    <a:pt x="3151391" y="184083"/>
+                  </a:lnTo>
+                  <a:lnTo>
+                    <a:pt x="3223013" y="187854"/>
+                  </a:lnTo>
+                  <a:lnTo>
+                    <a:pt x="3294636" y="191608"/>
+                  </a:lnTo>
+                  <a:lnTo>
+                    <a:pt x="3366258" y="195345"/>
+                  </a:lnTo>
+                  <a:lnTo>
+                    <a:pt x="3437881" y="199064"/>
+                  </a:lnTo>
+                  <a:lnTo>
+                    <a:pt x="3509503" y="202767"/>
+                  </a:lnTo>
+                  <a:lnTo>
+                    <a:pt x="3581126" y="206454"/>
+                  </a:lnTo>
+                  <a:lnTo>
+                    <a:pt x="3652748" y="210123"/>
+                  </a:lnTo>
+                  <a:lnTo>
+                    <a:pt x="3724371" y="213776"/>
+                  </a:lnTo>
+                  <a:lnTo>
+                    <a:pt x="3795993" y="217412"/>
+                  </a:lnTo>
+                  <a:lnTo>
+                    <a:pt x="3867616" y="221032"/>
+                  </a:lnTo>
+                  <a:lnTo>
+                    <a:pt x="3939238" y="224635"/>
+                  </a:lnTo>
+                  <a:lnTo>
+                    <a:pt x="4010861" y="228222"/>
+                  </a:lnTo>
+                  <a:lnTo>
+                    <a:pt x="4082483" y="231793"/>
+                  </a:lnTo>
+                  <a:lnTo>
+                    <a:pt x="4154106" y="235348"/>
+                  </a:lnTo>
+                  <a:lnTo>
+                    <a:pt x="4225729" y="238886"/>
+                  </a:lnTo>
+                  <a:lnTo>
+                    <a:pt x="4297351" y="242409"/>
+                  </a:lnTo>
+                  <a:lnTo>
+                    <a:pt x="4368974" y="245915"/>
+                  </a:lnTo>
+                  <a:lnTo>
+                    <a:pt x="4440596" y="249406"/>
+                  </a:lnTo>
+                  <a:lnTo>
+                    <a:pt x="4512219" y="252880"/>
+                  </a:lnTo>
+                  <a:lnTo>
+                    <a:pt x="4583841" y="256339"/>
+                  </a:lnTo>
+                  <a:lnTo>
+                    <a:pt x="4655464" y="259783"/>
+                  </a:lnTo>
+                  <a:lnTo>
+                    <a:pt x="4727086" y="263210"/>
+                  </a:lnTo>
+                  <a:lnTo>
+                    <a:pt x="4798709" y="266623"/>
+                  </a:lnTo>
+                  <a:lnTo>
+                    <a:pt x="4870331" y="270019"/>
+                  </a:lnTo>
+                  <a:lnTo>
+                    <a:pt x="4941954" y="273401"/>
+                  </a:lnTo>
+                  <a:lnTo>
+                    <a:pt x="5013576" y="276767"/>
+                  </a:lnTo>
+                  <a:lnTo>
+                    <a:pt x="5085199" y="280117"/>
+                  </a:lnTo>
+                  <a:lnTo>
+                    <a:pt x="5156821" y="283453"/>
+                  </a:lnTo>
+                  <a:lnTo>
+                    <a:pt x="5228444" y="286773"/>
+                  </a:lnTo>
+                  <a:lnTo>
+                    <a:pt x="5300066" y="290079"/>
+                  </a:lnTo>
+                  <a:lnTo>
+                    <a:pt x="5371689" y="293369"/>
+                  </a:lnTo>
+                  <a:lnTo>
+                    <a:pt x="5443311" y="296644"/>
+                  </a:lnTo>
+                  <a:lnTo>
+                    <a:pt x="5514934" y="299905"/>
+                  </a:lnTo>
+                  <a:lnTo>
+                    <a:pt x="5586557" y="303151"/>
+                  </a:lnTo>
+                  <a:lnTo>
+                    <a:pt x="5658179" y="306382"/>
+                  </a:lnTo>
+                  <a:lnTo>
+                    <a:pt x="5729802" y="309598"/>
+                  </a:lnTo>
+                  <a:lnTo>
+                    <a:pt x="5801424" y="312800"/>
+                  </a:lnTo>
+                  <a:lnTo>
+                    <a:pt x="5873047" y="315988"/>
+                  </a:lnTo>
+                  <a:lnTo>
+                    <a:pt x="5944669" y="319161"/>
+                  </a:lnTo>
+                  <a:lnTo>
+                    <a:pt x="6016292" y="322319"/>
+                  </a:lnTo>
+                  <a:lnTo>
+                    <a:pt x="6087914" y="325463"/>
+                  </a:lnTo>
+                  <a:lnTo>
+                    <a:pt x="6159537" y="328593"/>
+                  </a:lnTo>
+                  <a:lnTo>
+                    <a:pt x="6231159" y="331709"/>
+                  </a:lnTo>
+                  <a:lnTo>
+                    <a:pt x="6302782" y="334811"/>
+                  </a:lnTo>
+                  <a:lnTo>
+                    <a:pt x="6374404" y="337898"/>
+                  </a:lnTo>
+                  <a:lnTo>
+                    <a:pt x="6446027" y="340972"/>
+                  </a:lnTo>
+                  <a:lnTo>
+                    <a:pt x="6517649" y="344032"/>
+                  </a:lnTo>
+                  <a:lnTo>
+                    <a:pt x="6589272" y="347077"/>
+                  </a:lnTo>
+                  <a:lnTo>
+                    <a:pt x="6660894" y="350109"/>
+                  </a:lnTo>
+                  <a:lnTo>
+                    <a:pt x="6732517" y="353128"/>
+                  </a:lnTo>
+                  <a:lnTo>
+                    <a:pt x="6804139" y="356132"/>
+                  </a:lnTo>
+                  <a:lnTo>
+                    <a:pt x="6875762" y="359123"/>
+                  </a:lnTo>
+                  <a:lnTo>
+                    <a:pt x="6947385" y="362100"/>
+                  </a:lnTo>
+                  <a:lnTo>
+                    <a:pt x="7019007" y="365064"/>
+                  </a:lnTo>
+                  <a:lnTo>
+                    <a:pt x="7090630" y="368015"/>
                   </a:lnTo>
                 </a:path>
               </a:pathLst>
@@ -4660,7 +4660,7 @@
           </p:nvSpPr>
           <p:spPr>
             <a:xfrm>
-              <a:off x="4363883" y="2073503"/>
+              <a:off x="4368185" y="2073503"/>
               <a:ext cx="0" cy="3649639"/>
             </a:xfrm>
             <a:custGeom>
@@ -4703,7 +4703,7 @@
           </p:nvSpPr>
           <p:spPr>
             <a:xfrm>
-              <a:off x="3178931" y="2073503"/>
+              <a:off x="3176242" y="2073503"/>
               <a:ext cx="0" cy="3649639"/>
             </a:xfrm>
             <a:custGeom>
@@ -4746,7 +4746,7 @@
           </p:nvSpPr>
           <p:spPr>
             <a:xfrm>
-              <a:off x="5373904" y="2073503"/>
+              <a:off x="5386913" y="2073503"/>
               <a:ext cx="0" cy="3649639"/>
             </a:xfrm>
             <a:custGeom>
@@ -5019,7 +5019,7 @@
           </p:nvSpPr>
           <p:spPr>
             <a:xfrm>
-              <a:off x="1536080" y="5785772"/>
+              <a:off x="1536741" y="5785772"/>
               <a:ext cx="161574" cy="80101"/>
             </a:xfrm>
             <a:prstGeom prst="rect">
@@ -5065,7 +5065,7 @@
           </p:nvSpPr>
           <p:spPr>
             <a:xfrm>
-              <a:off x="3342736" y="5785772"/>
+              <a:off x="3341771" y="5785772"/>
               <a:ext cx="161574" cy="80101"/>
             </a:xfrm>
             <a:prstGeom prst="rect">
@@ -5111,7 +5111,7 @@
           </p:nvSpPr>
           <p:spPr>
             <a:xfrm>
-              <a:off x="5199088" y="5785772"/>
+              <a:off x="5196500" y="5785772"/>
               <a:ext cx="62179" cy="80101"/>
             </a:xfrm>
             <a:prstGeom prst="rect">
@@ -5157,7 +5157,7 @@
           </p:nvSpPr>
           <p:spPr>
             <a:xfrm>
-              <a:off x="6974654" y="5785772"/>
+              <a:off x="6970441" y="5785772"/>
               <a:ext cx="124358" cy="80101"/>
             </a:xfrm>
             <a:prstGeom prst="rect">
@@ -5328,7 +5328,7 @@
                   <a:latin typeface="Helvetica"/>
                   <a:cs typeface="Helvetica"/>
                 </a:rPr>
-                <a:t>subHR per 10 % decline: 1.06 (0.84-1.34), p_Bonf = 1.000 (n = 6)  |  per IQR decline (Δ = 24.3 %): 1.15 (0.65-2.05)  |  IQR: [-22.7, 1.6] %</a:t>
+                <a:t>subHR per 10 % decline: 1.06 (0.83-1.34), p_Bonf = 1.000 (n = 6)  |  per IQR decline (Δ = 24.5 %): 1.15 (0.64-2.06)  |  IQR: [-22.7, 1.8] %</a:t>
               </a:r>
             </a:p>
           </p:txBody>
